--- a/CalendarApp_Powerpoint.pptx
+++ b/CalendarApp_Powerpoint.pptx
@@ -110,6 +110,11 @@
       </a:defRPr>
     </a:lvl9pPr>
   </p:defaultTextStyle>
+  <p:extLst>
+    <p:ext uri="{EFAFB233-063F-42B5-8137-9DF3F51BA10A}">
+      <p15:sldGuideLst xmlns:p15="http://schemas.microsoft.com/office/powerpoint/2012/main"/>
+    </p:ext>
+  </p:extLst>
 </p:presentation>
 </file>
 
@@ -389,6 +394,30 @@
       </pc:sldChg>
     </pc:docChg>
   </pc:docChgLst>
+  <pc:docChgLst>
+    <pc:chgData name="Caroline Pradel" userId="52f372f68d297903" providerId="LiveId" clId="{2230F7C4-67A3-4EE6-B08F-3ADFEC37D923}"/>
+    <pc:docChg chg="custSel modSld">
+      <pc:chgData name="Caroline Pradel" userId="52f372f68d297903" providerId="LiveId" clId="{2230F7C4-67A3-4EE6-B08F-3ADFEC37D923}" dt="2026-06-17T13:38:26.381" v="419" actId="20577"/>
+      <pc:docMkLst>
+        <pc:docMk/>
+      </pc:docMkLst>
+      <pc:sldChg chg="modSp mod">
+        <pc:chgData name="Caroline Pradel" userId="52f372f68d297903" providerId="LiveId" clId="{2230F7C4-67A3-4EE6-B08F-3ADFEC37D923}" dt="2026-06-17T13:38:26.381" v="419" actId="20577"/>
+        <pc:sldMkLst>
+          <pc:docMk/>
+          <pc:sldMk cId="1650080889" sldId="258"/>
+        </pc:sldMkLst>
+        <pc:spChg chg="mod">
+          <ac:chgData name="Caroline Pradel" userId="52f372f68d297903" providerId="LiveId" clId="{2230F7C4-67A3-4EE6-B08F-3ADFEC37D923}" dt="2026-06-17T13:38:26.381" v="419" actId="20577"/>
+          <ac:spMkLst>
+            <pc:docMk/>
+            <pc:sldMk cId="1650080889" sldId="258"/>
+            <ac:spMk id="3" creationId="{19EA37C2-684E-C0F3-EB22-32830CEDA409}"/>
+          </ac:spMkLst>
+        </pc:spChg>
+      </pc:sldChg>
+    </pc:docChg>
+  </pc:docChgLst>
 </pc:chgInfo>
 </file>
 
@@ -553,7 +582,7 @@
           <a:p>
             <a:fld id="{76EFF5C7-0AED-406F-9BE7-8D732D5FB325}" type="datetimeFigureOut">
               <a:rPr lang="da-DK" smtClean="0"/>
-              <a:t>16-06-2026</a:t>
+              <a:t>17-06-2026</a:t>
             </a:fld>
             <a:endParaRPr lang="da-DK"/>
           </a:p>
@@ -897,7 +926,7 @@
           <a:p>
             <a:fld id="{76EFF5C7-0AED-406F-9BE7-8D732D5FB325}" type="datetimeFigureOut">
               <a:rPr lang="da-DK" smtClean="0"/>
-              <a:t>16-06-2026</a:t>
+              <a:t>17-06-2026</a:t>
             </a:fld>
             <a:endParaRPr lang="da-DK"/>
           </a:p>
@@ -1077,7 +1106,7 @@
           <a:p>
             <a:fld id="{76EFF5C7-0AED-406F-9BE7-8D732D5FB325}" type="datetimeFigureOut">
               <a:rPr lang="da-DK" smtClean="0"/>
-              <a:t>16-06-2026</a:t>
+              <a:t>17-06-2026</a:t>
             </a:fld>
             <a:endParaRPr lang="da-DK"/>
           </a:p>
@@ -1247,7 +1276,7 @@
           <a:p>
             <a:fld id="{76EFF5C7-0AED-406F-9BE7-8D732D5FB325}" type="datetimeFigureOut">
               <a:rPr lang="da-DK" smtClean="0"/>
-              <a:t>16-06-2026</a:t>
+              <a:t>17-06-2026</a:t>
             </a:fld>
             <a:endParaRPr lang="da-DK"/>
           </a:p>
@@ -1519,7 +1548,7 @@
           <a:p>
             <a:fld id="{76EFF5C7-0AED-406F-9BE7-8D732D5FB325}" type="datetimeFigureOut">
               <a:rPr lang="da-DK" smtClean="0"/>
-              <a:t>16-06-2026</a:t>
+              <a:t>17-06-2026</a:t>
             </a:fld>
             <a:endParaRPr lang="da-DK"/>
           </a:p>
@@ -1920,7 +1949,7 @@
           <a:p>
             <a:fld id="{76EFF5C7-0AED-406F-9BE7-8D732D5FB325}" type="datetimeFigureOut">
               <a:rPr lang="da-DK" smtClean="0"/>
-              <a:t>16-06-2026</a:t>
+              <a:t>17-06-2026</a:t>
             </a:fld>
             <a:endParaRPr lang="da-DK"/>
           </a:p>
@@ -2397,7 +2426,7 @@
           <a:p>
             <a:fld id="{76EFF5C7-0AED-406F-9BE7-8D732D5FB325}" type="datetimeFigureOut">
               <a:rPr lang="da-DK" smtClean="0"/>
-              <a:t>16-06-2026</a:t>
+              <a:t>17-06-2026</a:t>
             </a:fld>
             <a:endParaRPr lang="da-DK"/>
           </a:p>
@@ -2515,7 +2544,7 @@
           <a:p>
             <a:fld id="{76EFF5C7-0AED-406F-9BE7-8D732D5FB325}" type="datetimeFigureOut">
               <a:rPr lang="da-DK" smtClean="0"/>
-              <a:t>16-06-2026</a:t>
+              <a:t>17-06-2026</a:t>
             </a:fld>
             <a:endParaRPr lang="da-DK"/>
           </a:p>
@@ -2610,7 +2639,7 @@
           <a:p>
             <a:fld id="{76EFF5C7-0AED-406F-9BE7-8D732D5FB325}" type="datetimeFigureOut">
               <a:rPr lang="da-DK" smtClean="0"/>
-              <a:t>16-06-2026</a:t>
+              <a:t>17-06-2026</a:t>
             </a:fld>
             <a:endParaRPr lang="da-DK"/>
           </a:p>
@@ -2963,7 +2992,7 @@
           <a:p>
             <a:fld id="{76EFF5C7-0AED-406F-9BE7-8D732D5FB325}" type="datetimeFigureOut">
               <a:rPr lang="da-DK" smtClean="0"/>
-              <a:t>16-06-2026</a:t>
+              <a:t>17-06-2026</a:t>
             </a:fld>
             <a:endParaRPr lang="da-DK"/>
           </a:p>
@@ -3365,7 +3394,7 @@
           <a:p>
             <a:fld id="{76EFF5C7-0AED-406F-9BE7-8D732D5FB325}" type="datetimeFigureOut">
               <a:rPr lang="da-DK" smtClean="0"/>
-              <a:t>16-06-2026</a:t>
+              <a:t>17-06-2026</a:t>
             </a:fld>
             <a:endParaRPr lang="da-DK"/>
           </a:p>
@@ -3647,7 +3676,7 @@
           <a:p>
             <a:fld id="{76EFF5C7-0AED-406F-9BE7-8D732D5FB325}" type="datetimeFigureOut">
               <a:rPr lang="da-DK" smtClean="0"/>
-              <a:t>16-06-2026</a:t>
+              <a:t>17-06-2026</a:t>
             </a:fld>
             <a:endParaRPr lang="da-DK"/>
           </a:p>
@@ -4643,6 +4672,176 @@
             </a:r>
           </a:p>
           <a:p>
+            <a:r>
+              <a:rPr lang="en-US" dirty="0">
+                <a:solidFill>
+                  <a:schemeClr val="tx2">
+                    <a:lumMod val="75000"/>
+                  </a:schemeClr>
+                </a:solidFill>
+              </a:rPr>
+              <a:t>Quick GUI</a:t>
+            </a:r>
+          </a:p>
+          <a:p>
+            <a:pPr lvl="1"/>
+            <a:r>
+              <a:rPr lang="en-US" dirty="0">
+                <a:solidFill>
+                  <a:schemeClr val="tx2">
+                    <a:lumMod val="75000"/>
+                  </a:schemeClr>
+                </a:solidFill>
+              </a:rPr>
+              <a:t>JavaFX</a:t>
+            </a:r>
+          </a:p>
+          <a:p>
+            <a:r>
+              <a:rPr lang="en-US" noProof="0" dirty="0">
+                <a:solidFill>
+                  <a:schemeClr val="tx2">
+                    <a:lumMod val="75000"/>
+                  </a:schemeClr>
+                </a:solidFill>
+              </a:rPr>
+              <a:t>Microsoft Graph API</a:t>
+            </a:r>
+          </a:p>
+          <a:p>
+            <a:pPr lvl="1"/>
+            <a:r>
+              <a:rPr lang="en-US" b="1" dirty="0" err="1">
+                <a:solidFill>
+                  <a:schemeClr val="tx2">
+                    <a:lumMod val="75000"/>
+                  </a:schemeClr>
+                </a:solidFill>
+              </a:rPr>
+              <a:t>Fx</a:t>
+            </a:r>
+            <a:r>
+              <a:rPr lang="en-US" noProof="0" dirty="0">
+                <a:solidFill>
+                  <a:schemeClr val="tx2">
+                    <a:lumMod val="75000"/>
+                  </a:schemeClr>
+                </a:solidFill>
+              </a:rPr>
+              <a:t> Calendars</a:t>
+            </a:r>
+            <a:r>
+              <a:rPr lang="en-US" dirty="0">
+                <a:solidFill>
+                  <a:schemeClr val="tx2">
+                    <a:lumMod val="75000"/>
+                  </a:schemeClr>
+                </a:solidFill>
+              </a:rPr>
+              <a:t>.</a:t>
+            </a:r>
+            <a:r>
+              <a:rPr lang="en-US" dirty="0" err="1">
+                <a:solidFill>
+                  <a:schemeClr val="tx2">
+                    <a:lumMod val="75000"/>
+                  </a:schemeClr>
+                </a:solidFill>
+              </a:rPr>
+              <a:t>ReadWrite</a:t>
+            </a:r>
+            <a:r>
+              <a:rPr lang="en-US" dirty="0">
+                <a:solidFill>
+                  <a:schemeClr val="tx2">
+                    <a:lumMod val="75000"/>
+                  </a:schemeClr>
+                </a:solidFill>
+              </a:rPr>
+              <a:t>, </a:t>
+            </a:r>
+            <a:r>
+              <a:rPr lang="en-US" dirty="0" err="1">
+                <a:solidFill>
+                  <a:schemeClr val="tx2">
+                    <a:lumMod val="75000"/>
+                  </a:schemeClr>
+                </a:solidFill>
+              </a:rPr>
+              <a:t>User.Read</a:t>
+            </a:r>
+            <a:endParaRPr lang="en-US" dirty="0">
+              <a:solidFill>
+                <a:schemeClr val="tx2">
+                  <a:lumMod val="75000"/>
+                </a:schemeClr>
+              </a:solidFill>
+            </a:endParaRPr>
+          </a:p>
+          <a:p>
+            <a:pPr lvl="1"/>
+            <a:r>
+              <a:rPr lang="en-US" noProof="0" dirty="0">
+                <a:solidFill>
+                  <a:schemeClr val="tx2">
+                    <a:lumMod val="75000"/>
+                  </a:schemeClr>
+                </a:solidFill>
+              </a:rPr>
+              <a:t>Study accounts</a:t>
+            </a:r>
+          </a:p>
+          <a:p>
+            <a:r>
+              <a:rPr lang="en-US" dirty="0">
+                <a:solidFill>
+                  <a:schemeClr val="tx2">
+                    <a:lumMod val="75000"/>
+                  </a:schemeClr>
+                </a:solidFill>
+              </a:rPr>
+              <a:t>Ini File to save information</a:t>
+            </a:r>
+          </a:p>
+          <a:p>
+            <a:pPr lvl="1"/>
+            <a:r>
+              <a:rPr lang="en-US" dirty="0">
+                <a:solidFill>
+                  <a:schemeClr val="tx2">
+                    <a:lumMod val="75000"/>
+                  </a:schemeClr>
+                </a:solidFill>
+              </a:rPr>
+              <a:t>Simplifying user experience</a:t>
+            </a:r>
+          </a:p>
+          <a:p>
+            <a:pPr lvl="1"/>
+            <a:r>
+              <a:rPr lang="en-US" dirty="0">
+                <a:solidFill>
+                  <a:schemeClr val="tx2">
+                    <a:lumMod val="75000"/>
+                  </a:schemeClr>
+                </a:solidFill>
+              </a:rPr>
+              <a:t>Customizing appearance</a:t>
+            </a:r>
+          </a:p>
+          <a:p>
+            <a:endParaRPr lang="en-US" dirty="0">
+              <a:solidFill>
+                <a:schemeClr val="tx2">
+                  <a:lumMod val="75000"/>
+                </a:schemeClr>
+              </a:solidFill>
+            </a:endParaRPr>
+          </a:p>
+          <a:p>
+            <a:pPr marL="530352" lvl="1" indent="0">
+              <a:buNone/>
+            </a:pPr>
             <a:endParaRPr lang="en-US" dirty="0">
               <a:solidFill>
                 <a:schemeClr val="tx2">

--- a/CalendarApp_Powerpoint.pptx
+++ b/CalendarApp_Powerpoint.pptx
@@ -10,8 +10,7 @@
     <p:sldId id="258" r:id="rId4"/>
     <p:sldId id="259" r:id="rId5"/>
     <p:sldId id="260" r:id="rId6"/>
-    <p:sldId id="261" r:id="rId7"/>
-    <p:sldId id="262" r:id="rId8"/>
+    <p:sldId id="262" r:id="rId7"/>
   </p:sldIdLst>
   <p:sldSz cx="12192000" cy="6858000"/>
   <p:notesSz cx="6858000" cy="9144000"/>
@@ -116,6 +115,14 @@
     </p:ext>
   </p:extLst>
 </p:presentation>
+</file>
+
+<file path=ppt/revisionInfo.xml><?xml version="1.0" encoding="utf-8"?>
+<p1510:revInfo xmlns:a="http://schemas.openxmlformats.org/drawingml/2006/main" xmlns:r="http://schemas.openxmlformats.org/officeDocument/2006/relationships" xmlns:p1510="http://schemas.microsoft.com/office/powerpoint/2015/10/main">
+  <p1510:revLst>
+    <p1510:client id="{8BCB172C-B80E-4AD9-9D6D-306488564516}" v="1" dt="2026-06-17T13:43:56.560"/>
+  </p1510:revLst>
+</p1510:revInfo>
 </file>
 
 <file path=ppt/changesInfos/changesInfo1.xml><?xml version="1.0" encoding="utf-8"?>
@@ -396,25 +403,71 @@
   </pc:docChgLst>
   <pc:docChgLst>
     <pc:chgData name="Caroline Pradel" userId="52f372f68d297903" providerId="LiveId" clId="{2230F7C4-67A3-4EE6-B08F-3ADFEC37D923}"/>
-    <pc:docChg chg="custSel modSld">
-      <pc:chgData name="Caroline Pradel" userId="52f372f68d297903" providerId="LiveId" clId="{2230F7C4-67A3-4EE6-B08F-3ADFEC37D923}" dt="2026-06-17T13:38:26.381" v="419" actId="20577"/>
+    <pc:docChg chg="custSel delSld modSld">
+      <pc:chgData name="Caroline Pradel" userId="52f372f68d297903" providerId="LiveId" clId="{2230F7C4-67A3-4EE6-B08F-3ADFEC37D923}" dt="2026-06-17T13:57:09.292" v="540" actId="1582"/>
       <pc:docMkLst>
         <pc:docMk/>
       </pc:docMkLst>
-      <pc:sldChg chg="modSp mod">
-        <pc:chgData name="Caroline Pradel" userId="52f372f68d297903" providerId="LiveId" clId="{2230F7C4-67A3-4EE6-B08F-3ADFEC37D923}" dt="2026-06-17T13:38:26.381" v="419" actId="20577"/>
+      <pc:sldChg chg="addSp delSp modSp mod">
+        <pc:chgData name="Caroline Pradel" userId="52f372f68d297903" providerId="LiveId" clId="{2230F7C4-67A3-4EE6-B08F-3ADFEC37D923}" dt="2026-06-17T13:57:09.292" v="540" actId="1582"/>
         <pc:sldMkLst>
           <pc:docMk/>
           <pc:sldMk cId="1650080889" sldId="258"/>
         </pc:sldMkLst>
         <pc:spChg chg="mod">
-          <ac:chgData name="Caroline Pradel" userId="52f372f68d297903" providerId="LiveId" clId="{2230F7C4-67A3-4EE6-B08F-3ADFEC37D923}" dt="2026-06-17T13:38:26.381" v="419" actId="20577"/>
+          <ac:chgData name="Caroline Pradel" userId="52f372f68d297903" providerId="LiveId" clId="{2230F7C4-67A3-4EE6-B08F-3ADFEC37D923}" dt="2026-06-17T13:48:32.880" v="439" actId="14100"/>
           <ac:spMkLst>
             <pc:docMk/>
             <pc:sldMk cId="1650080889" sldId="258"/>
             <ac:spMk id="3" creationId="{19EA37C2-684E-C0F3-EB22-32830CEDA409}"/>
           </ac:spMkLst>
         </pc:spChg>
+        <pc:spChg chg="del">
+          <ac:chgData name="Caroline Pradel" userId="52f372f68d297903" providerId="LiveId" clId="{2230F7C4-67A3-4EE6-B08F-3ADFEC37D923}" dt="2026-06-17T13:44:04.658" v="421" actId="478"/>
+          <ac:spMkLst>
+            <pc:docMk/>
+            <pc:sldMk cId="1650080889" sldId="258"/>
+            <ac:spMk id="7" creationId="{E5D61E61-1D06-B017-6D1C-E179CECED51D}"/>
+          </ac:spMkLst>
+        </pc:spChg>
+        <pc:picChg chg="add del mod">
+          <ac:chgData name="Caroline Pradel" userId="52f372f68d297903" providerId="LiveId" clId="{2230F7C4-67A3-4EE6-B08F-3ADFEC37D923}" dt="2026-06-17T13:54:55.349" v="532" actId="478"/>
+          <ac:picMkLst>
+            <pc:docMk/>
+            <pc:sldMk cId="1650080889" sldId="258"/>
+            <ac:picMk id="4" creationId="{3137EC1F-8ED5-E0A5-CB93-7CD77F6DD1C8}"/>
+          </ac:picMkLst>
+        </pc:picChg>
+        <pc:picChg chg="add mod">
+          <ac:chgData name="Caroline Pradel" userId="52f372f68d297903" providerId="LiveId" clId="{2230F7C4-67A3-4EE6-B08F-3ADFEC37D923}" dt="2026-06-17T13:57:09.292" v="540" actId="1582"/>
+          <ac:picMkLst>
+            <pc:docMk/>
+            <pc:sldMk cId="1650080889" sldId="258"/>
+            <ac:picMk id="5" creationId="{CAE4781C-BFA1-F9DA-E19F-76380C495126}"/>
+          </ac:picMkLst>
+        </pc:picChg>
+      </pc:sldChg>
+      <pc:sldChg chg="modSp mod">
+        <pc:chgData name="Caroline Pradel" userId="52f372f68d297903" providerId="LiveId" clId="{2230F7C4-67A3-4EE6-B08F-3ADFEC37D923}" dt="2026-06-17T13:51:36.280" v="530" actId="20577"/>
+        <pc:sldMkLst>
+          <pc:docMk/>
+          <pc:sldMk cId="160134776" sldId="260"/>
+        </pc:sldMkLst>
+        <pc:spChg chg="mod">
+          <ac:chgData name="Caroline Pradel" userId="52f372f68d297903" providerId="LiveId" clId="{2230F7C4-67A3-4EE6-B08F-3ADFEC37D923}" dt="2026-06-17T13:51:36.280" v="530" actId="20577"/>
+          <ac:spMkLst>
+            <pc:docMk/>
+            <pc:sldMk cId="160134776" sldId="260"/>
+            <ac:spMk id="3" creationId="{AC73C89D-4AEC-86C7-C92D-B698C9418E28}"/>
+          </ac:spMkLst>
+        </pc:spChg>
+      </pc:sldChg>
+      <pc:sldChg chg="del">
+        <pc:chgData name="Caroline Pradel" userId="52f372f68d297903" providerId="LiveId" clId="{2230F7C4-67A3-4EE6-B08F-3ADFEC37D923}" dt="2026-06-17T13:52:12.878" v="531" actId="2696"/>
+        <pc:sldMkLst>
+          <pc:docMk/>
+          <pc:sldMk cId="1980791038" sldId="261"/>
+        </pc:sldMkLst>
       </pc:sldChg>
     </pc:docChg>
   </pc:docChgLst>
@@ -4655,7 +4708,12 @@
             <p:ph idx="1"/>
           </p:nvPr>
         </p:nvSpPr>
-        <p:spPr/>
+        <p:spPr>
+          <a:xfrm>
+            <a:off x="123731" y="1707711"/>
+            <a:ext cx="5145385" cy="5004366"/>
+          </a:xfrm>
+        </p:spPr>
         <p:txBody>
           <a:bodyPr/>
           <a:lstStyle/>
@@ -4852,42 +4910,41 @@
           </a:p>
         </p:txBody>
       </p:sp>
-      <p:sp>
-        <p:nvSpPr>
-          <p:cNvPr id="7" name="Pladsholder til indhold 2">
+      <p:pic>
+        <p:nvPicPr>
+          <p:cNvPr id="5" name="Billede 4" descr="Åbn billede">
             <a:extLst>
               <a:ext uri="{FF2B5EF4-FFF2-40B4-BE49-F238E27FC236}">
-                <a16:creationId xmlns:a16="http://schemas.microsoft.com/office/drawing/2014/main" id="{E5D61E61-1D06-B017-6D1C-E179CECED51D}"/>
+                <a16:creationId xmlns:a16="http://schemas.microsoft.com/office/drawing/2014/main" id="{CAE4781C-BFA1-F9DA-E19F-76380C495126}"/>
               </a:ext>
             </a:extLst>
           </p:cNvPr>
-          <p:cNvSpPr>
-            <a:spLocks noGrp="1"/>
-          </p:cNvSpPr>
-          <p:nvPr>
-            <p:ph type="body" sz="half" idx="2"/>
-          </p:nvPr>
-        </p:nvSpPr>
+          <p:cNvPicPr>
+            <a:picLocks noChangeAspect="1"/>
+          </p:cNvPicPr>
+          <p:nvPr/>
+        </p:nvPicPr>
+        <p:blipFill>
+          <a:blip r:embed="rId2"/>
+          <a:stretch>
+            <a:fillRect/>
+          </a:stretch>
+        </p:blipFill>
         <p:spPr>
           <a:xfrm>
-            <a:off x="723900" y="2855913"/>
-            <a:ext cx="3856038" cy="3011487"/>
+            <a:off x="5798443" y="1707711"/>
+            <a:ext cx="6096000" cy="3562350"/>
           </a:xfrm>
+          <a:prstGeom prst="rect">
+            <a:avLst/>
+          </a:prstGeom>
+          <a:ln w="12700">
+            <a:solidFill>
+              <a:schemeClr val="tx1"/>
+            </a:solidFill>
+          </a:ln>
         </p:spPr>
-        <p:txBody>
-          <a:bodyPr/>
-          <a:lstStyle/>
-          <a:p>
-            <a:endParaRPr lang="en-US" dirty="0">
-              <a:solidFill>
-                <a:schemeClr val="tx2">
-                  <a:lumMod val="75000"/>
-                </a:schemeClr>
-              </a:solidFill>
-            </a:endParaRPr>
-          </a:p>
-        </p:txBody>
-      </p:sp>
+      </p:pic>
     </p:spTree>
     <p:extLst>
       <p:ext uri="{BB962C8B-B14F-4D97-AF65-F5344CB8AC3E}">
@@ -5519,6 +5576,51 @@
               </a:rPr>
               <a:t>a potential customer think about the calendar?</a:t>
             </a:r>
+          </a:p>
+          <a:p>
+            <a:r>
+              <a:rPr lang="en-US" noProof="0" dirty="0">
+                <a:solidFill>
+                  <a:schemeClr val="tx2">
+                    <a:lumMod val="75000"/>
+                  </a:schemeClr>
+                </a:solidFill>
+              </a:rPr>
+              <a:t>Unit</a:t>
+            </a:r>
+            <a:r>
+              <a:rPr lang="en-US" dirty="0">
+                <a:solidFill>
+                  <a:schemeClr val="tx2">
+                    <a:lumMod val="75000"/>
+                  </a:schemeClr>
+                </a:solidFill>
+              </a:rPr>
+              <a:t> testing</a:t>
+            </a:r>
+          </a:p>
+          <a:p>
+            <a:pPr lvl="1"/>
+            <a:r>
+              <a:rPr lang="en-US" noProof="0" dirty="0">
+                <a:solidFill>
+                  <a:schemeClr val="tx2">
+                    <a:lumMod val="75000"/>
+                  </a:schemeClr>
+                </a:solidFill>
+              </a:rPr>
+              <a:t>Testi</a:t>
+            </a:r>
+            <a:r>
+              <a:rPr lang="en-US" dirty="0">
+                <a:solidFill>
+                  <a:schemeClr val="tx2">
+                    <a:lumMod val="75000"/>
+                  </a:schemeClr>
+                </a:solidFill>
+              </a:rPr>
+              <a:t>ng the procedures and functions directly in the code</a:t>
+            </a:r>
             <a:endParaRPr lang="en-US" noProof="0" dirty="0">
               <a:solidFill>
                 <a:schemeClr val="tx2">
@@ -5552,104 +5654,6 @@
 </file>
 
 <file path=ppt/slides/slide6.xml><?xml version="1.0" encoding="utf-8"?>
-<p:sld xmlns:a="http://schemas.openxmlformats.org/drawingml/2006/main" xmlns:r="http://schemas.openxmlformats.org/officeDocument/2006/relationships" xmlns:p="http://schemas.openxmlformats.org/presentationml/2006/main">
-  <p:cSld>
-    <p:spTree>
-      <p:nvGrpSpPr>
-        <p:cNvPr id="1" name=""/>
-        <p:cNvGrpSpPr/>
-        <p:nvPr/>
-      </p:nvGrpSpPr>
-      <p:grpSpPr>
-        <a:xfrm>
-          <a:off x="0" y="0"/>
-          <a:ext cx="0" cy="0"/>
-          <a:chOff x="0" y="0"/>
-          <a:chExt cx="0" cy="0"/>
-        </a:xfrm>
-      </p:grpSpPr>
-      <p:sp>
-        <p:nvSpPr>
-          <p:cNvPr id="2" name="Titel 1">
-            <a:extLst>
-              <a:ext uri="{FF2B5EF4-FFF2-40B4-BE49-F238E27FC236}">
-                <a16:creationId xmlns:a16="http://schemas.microsoft.com/office/drawing/2014/main" id="{5C10BD1F-078B-9D3C-BF22-DE547139368A}"/>
-              </a:ext>
-            </a:extLst>
-          </p:cNvPr>
-          <p:cNvSpPr>
-            <a:spLocks noGrp="1"/>
-          </p:cNvSpPr>
-          <p:nvPr>
-            <p:ph type="title"/>
-          </p:nvPr>
-        </p:nvSpPr>
-        <p:spPr/>
-        <p:txBody>
-          <a:bodyPr/>
-          <a:lstStyle/>
-          <a:p>
-            <a:r>
-              <a:rPr lang="da-DK" dirty="0">
-                <a:solidFill>
-                  <a:schemeClr val="tx2">
-                    <a:lumMod val="50000"/>
-                  </a:schemeClr>
-                </a:solidFill>
-              </a:rPr>
-              <a:t>Project management</a:t>
-            </a:r>
-          </a:p>
-        </p:txBody>
-      </p:sp>
-      <p:sp>
-        <p:nvSpPr>
-          <p:cNvPr id="3" name="Pladsholder til indhold 2">
-            <a:extLst>
-              <a:ext uri="{FF2B5EF4-FFF2-40B4-BE49-F238E27FC236}">
-                <a16:creationId xmlns:a16="http://schemas.microsoft.com/office/drawing/2014/main" id="{FD11AEB0-D688-D764-7489-D07DDBF0AB1C}"/>
-              </a:ext>
-            </a:extLst>
-          </p:cNvPr>
-          <p:cNvSpPr>
-            <a:spLocks noGrp="1"/>
-          </p:cNvSpPr>
-          <p:nvPr>
-            <p:ph idx="1"/>
-          </p:nvPr>
-        </p:nvSpPr>
-        <p:spPr/>
-        <p:txBody>
-          <a:bodyPr/>
-          <a:lstStyle/>
-          <a:p>
-            <a:r>
-              <a:rPr lang="da-DK" dirty="0">
-                <a:solidFill>
-                  <a:schemeClr val="tx2">
-                    <a:lumMod val="75000"/>
-                  </a:schemeClr>
-                </a:solidFill>
-              </a:rPr>
-              <a:t>Skal vi overhovedet have den her?</a:t>
-            </a:r>
-          </a:p>
-        </p:txBody>
-      </p:sp>
-    </p:spTree>
-    <p:extLst>
-      <p:ext uri="{BB962C8B-B14F-4D97-AF65-F5344CB8AC3E}">
-        <p14:creationId xmlns:p14="http://schemas.microsoft.com/office/powerpoint/2010/main" val="1980791038"/>
-      </p:ext>
-    </p:extLst>
-  </p:cSld>
-  <p:clrMapOvr>
-    <a:masterClrMapping/>
-  </p:clrMapOvr>
-</p:sld>
-</file>
-
-<file path=ppt/slides/slide7.xml><?xml version="1.0" encoding="utf-8"?>
 <p:sld xmlns:a="http://schemas.openxmlformats.org/drawingml/2006/main" xmlns:r="http://schemas.openxmlformats.org/officeDocument/2006/relationships" xmlns:p="http://schemas.openxmlformats.org/presentationml/2006/main">
   <p:cSld>
     <p:spTree>

--- a/CalendarApp_Powerpoint.pptx
+++ b/CalendarApp_Powerpoint.pptx
@@ -10,7 +10,7 @@
     <p:sldId id="258" r:id="rId4"/>
     <p:sldId id="259" r:id="rId5"/>
     <p:sldId id="260" r:id="rId6"/>
-    <p:sldId id="262" r:id="rId7"/>
+    <p:sldId id="263" r:id="rId7"/>
   </p:sldIdLst>
   <p:sldSz cx="12192000" cy="6858000"/>
   <p:notesSz cx="6858000" cy="9144000"/>
@@ -117,20 +117,12 @@
 </p:presentation>
 </file>
 
-<file path=ppt/revisionInfo.xml><?xml version="1.0" encoding="utf-8"?>
-<p1510:revInfo xmlns:a="http://schemas.openxmlformats.org/drawingml/2006/main" xmlns:r="http://schemas.openxmlformats.org/officeDocument/2006/relationships" xmlns:p1510="http://schemas.microsoft.com/office/powerpoint/2015/10/main">
-  <p1510:revLst>
-    <p1510:client id="{8BCB172C-B80E-4AD9-9D6D-306488564516}" v="1" dt="2026-06-17T13:43:56.560"/>
-  </p1510:revLst>
-</p1510:revInfo>
-</file>
-
 <file path=ppt/changesInfos/changesInfo1.xml><?xml version="1.0" encoding="utf-8"?>
 <pc:chgInfo xmlns:a="http://schemas.openxmlformats.org/drawingml/2006/main" xmlns:r="http://schemas.openxmlformats.org/officeDocument/2006/relationships" xmlns:ac="http://schemas.microsoft.com/office/drawing/2013/main/command" xmlns:pc="http://schemas.microsoft.com/office/powerpoint/2013/main/command">
   <pc:docChgLst>
     <pc:chgData name="Katarina Heüman Funch" userId="4c116d6fe25a2bfb" providerId="LiveId" clId="{7DF22670-5938-4D81-A7CB-381824D9E4E5}"/>
-    <pc:docChg chg="undo custSel addSld modSld">
-      <pc:chgData name="Katarina Heüman Funch" userId="4c116d6fe25a2bfb" providerId="LiveId" clId="{7DF22670-5938-4D81-A7CB-381824D9E4E5}" dt="2026-06-16T21:17:16.399" v="2126" actId="20577"/>
+    <pc:docChg chg="undo custSel addSld delSld modSld">
+      <pc:chgData name="Katarina Heüman Funch" userId="4c116d6fe25a2bfb" providerId="LiveId" clId="{7DF22670-5938-4D81-A7CB-381824D9E4E5}" dt="2026-06-18T19:46:20.992" v="2639" actId="27636"/>
       <pc:docMkLst>
         <pc:docMk/>
       </pc:docMkLst>
@@ -202,38 +194,6 @@
             <ac:spMk id="3" creationId="{19EA37C2-684E-C0F3-EB22-32830CEDA409}"/>
           </ac:spMkLst>
         </pc:spChg>
-        <pc:spChg chg="add del mod">
-          <ac:chgData name="Katarina Heüman Funch" userId="4c116d6fe25a2bfb" providerId="LiveId" clId="{7DF22670-5938-4D81-A7CB-381824D9E4E5}" dt="2026-06-16T20:46:57.136" v="995"/>
-          <ac:spMkLst>
-            <pc:docMk/>
-            <pc:sldMk cId="1650080889" sldId="258"/>
-            <ac:spMk id="4" creationId="{C05868CE-4E69-ECF1-A870-559907FA89A2}"/>
-          </ac:spMkLst>
-        </pc:spChg>
-        <pc:spChg chg="add mod">
-          <ac:chgData name="Katarina Heüman Funch" userId="4c116d6fe25a2bfb" providerId="LiveId" clId="{7DF22670-5938-4D81-A7CB-381824D9E4E5}" dt="2026-06-16T20:42:24.088" v="896"/>
-          <ac:spMkLst>
-            <pc:docMk/>
-            <pc:sldMk cId="1650080889" sldId="258"/>
-            <ac:spMk id="5" creationId="{F30FBEE8-457A-03C4-C26A-7985CC8F0028}"/>
-          </ac:spMkLst>
-        </pc:spChg>
-        <pc:spChg chg="add mod">
-          <ac:chgData name="Katarina Heüman Funch" userId="4c116d6fe25a2bfb" providerId="LiveId" clId="{7DF22670-5938-4D81-A7CB-381824D9E4E5}" dt="2026-06-16T20:45:56.559" v="949"/>
-          <ac:spMkLst>
-            <pc:docMk/>
-            <pc:sldMk cId="1650080889" sldId="258"/>
-            <ac:spMk id="6" creationId="{E18E92A2-1C75-23AF-B966-42C92139A136}"/>
-          </ac:spMkLst>
-        </pc:spChg>
-        <pc:spChg chg="add mod">
-          <ac:chgData name="Katarina Heüman Funch" userId="4c116d6fe25a2bfb" providerId="LiveId" clId="{7DF22670-5938-4D81-A7CB-381824D9E4E5}" dt="2026-06-16T20:47:08.025" v="996" actId="20577"/>
-          <ac:spMkLst>
-            <pc:docMk/>
-            <pc:sldMk cId="1650080889" sldId="258"/>
-            <ac:spMk id="7" creationId="{E5D61E61-1D06-B017-6D1C-E179CECED51D}"/>
-          </ac:spMkLst>
-        </pc:spChg>
       </pc:sldChg>
       <pc:sldChg chg="addSp delSp modSp new mod">
         <pc:chgData name="Katarina Heüman Funch" userId="4c116d6fe25a2bfb" providerId="LiveId" clId="{7DF22670-5938-4D81-A7CB-381824D9E4E5}" dt="2026-06-16T21:05:05.891" v="1670" actId="20577"/>
@@ -257,44 +217,12 @@
             <ac:spMk id="3" creationId="{12ED665D-931B-5EC3-47F3-B4D68ED75BFF}"/>
           </ac:spMkLst>
         </pc:spChg>
-        <pc:spChg chg="del mod">
-          <ac:chgData name="Katarina Heüman Funch" userId="4c116d6fe25a2bfb" providerId="LiveId" clId="{7DF22670-5938-4D81-A7CB-381824D9E4E5}" dt="2026-06-16T20:49:20.402" v="1018" actId="478"/>
-          <ac:spMkLst>
-            <pc:docMk/>
-            <pc:sldMk cId="4095286617" sldId="259"/>
-            <ac:spMk id="4" creationId="{A86C04EA-B299-601F-36DF-8C999E152AE8}"/>
-          </ac:spMkLst>
-        </pc:spChg>
-        <pc:spChg chg="add del">
-          <ac:chgData name="Katarina Heüman Funch" userId="4c116d6fe25a2bfb" providerId="LiveId" clId="{7DF22670-5938-4D81-A7CB-381824D9E4E5}" dt="2026-06-16T20:49:36.161" v="1020" actId="478"/>
-          <ac:spMkLst>
-            <pc:docMk/>
-            <pc:sldMk cId="4095286617" sldId="259"/>
-            <ac:spMk id="5" creationId="{B7096EAC-CA44-E145-C8C4-D486ECA8636B}"/>
-          </ac:spMkLst>
-        </pc:spChg>
         <pc:spChg chg="add mod">
           <ac:chgData name="Katarina Heüman Funch" userId="4c116d6fe25a2bfb" providerId="LiveId" clId="{7DF22670-5938-4D81-A7CB-381824D9E4E5}" dt="2026-06-16T20:52:06.631" v="1047" actId="207"/>
           <ac:spMkLst>
             <pc:docMk/>
             <pc:sldMk cId="4095286617" sldId="259"/>
             <ac:spMk id="6" creationId="{6B322BCA-D15E-F258-E573-2D32A1A87165}"/>
-          </ac:spMkLst>
-        </pc:spChg>
-        <pc:spChg chg="add del mod">
-          <ac:chgData name="Katarina Heüman Funch" userId="4c116d6fe25a2bfb" providerId="LiveId" clId="{7DF22670-5938-4D81-A7CB-381824D9E4E5}" dt="2026-06-16T20:52:21.300" v="1051" actId="478"/>
-          <ac:spMkLst>
-            <pc:docMk/>
-            <pc:sldMk cId="4095286617" sldId="259"/>
-            <ac:spMk id="8" creationId="{6F8E7B80-A72C-A0FD-C384-D5F7994F54E3}"/>
-          </ac:spMkLst>
-        </pc:spChg>
-        <pc:spChg chg="add del mod">
-          <ac:chgData name="Katarina Heüman Funch" userId="4c116d6fe25a2bfb" providerId="LiveId" clId="{7DF22670-5938-4D81-A7CB-381824D9E4E5}" dt="2026-06-16T20:52:17.099" v="1049" actId="478"/>
-          <ac:spMkLst>
-            <pc:docMk/>
-            <pc:sldMk cId="4095286617" sldId="259"/>
-            <ac:spMk id="10" creationId="{E95A7F68-616B-FC6F-FC39-286131A1C2B9}"/>
           </ac:spMkLst>
         </pc:spChg>
         <pc:spChg chg="add mod">
@@ -353,49 +281,57 @@
           </ac:spMkLst>
         </pc:spChg>
       </pc:sldChg>
-      <pc:sldChg chg="modSp new mod">
-        <pc:chgData name="Katarina Heüman Funch" userId="4c116d6fe25a2bfb" providerId="LiveId" clId="{7DF22670-5938-4D81-A7CB-381824D9E4E5}" dt="2026-06-16T21:15:46.317" v="2049" actId="20577"/>
-        <pc:sldMkLst>
-          <pc:docMk/>
-          <pc:sldMk cId="1980791038" sldId="261"/>
-        </pc:sldMkLst>
-        <pc:spChg chg="mod">
-          <ac:chgData name="Katarina Heüman Funch" userId="4c116d6fe25a2bfb" providerId="LiveId" clId="{7DF22670-5938-4D81-A7CB-381824D9E4E5}" dt="2026-06-16T21:15:39.427" v="2016" actId="20577"/>
-          <ac:spMkLst>
-            <pc:docMk/>
-            <pc:sldMk cId="1980791038" sldId="261"/>
-            <ac:spMk id="2" creationId="{5C10BD1F-078B-9D3C-BF22-DE547139368A}"/>
-          </ac:spMkLst>
-        </pc:spChg>
-        <pc:spChg chg="mod">
-          <ac:chgData name="Katarina Heüman Funch" userId="4c116d6fe25a2bfb" providerId="LiveId" clId="{7DF22670-5938-4D81-A7CB-381824D9E4E5}" dt="2026-06-16T21:15:46.317" v="2049" actId="20577"/>
-          <ac:spMkLst>
-            <pc:docMk/>
-            <pc:sldMk cId="1980791038" sldId="261"/>
-            <ac:spMk id="3" creationId="{FD11AEB0-D688-D764-7489-D07DDBF0AB1C}"/>
-          </ac:spMkLst>
-        </pc:spChg>
-      </pc:sldChg>
-      <pc:sldChg chg="modSp new mod">
-        <pc:chgData name="Katarina Heüman Funch" userId="4c116d6fe25a2bfb" providerId="LiveId" clId="{7DF22670-5938-4D81-A7CB-381824D9E4E5}" dt="2026-06-16T21:17:16.399" v="2126" actId="20577"/>
+      <pc:sldChg chg="modSp new del mod">
+        <pc:chgData name="Katarina Heüman Funch" userId="4c116d6fe25a2bfb" providerId="LiveId" clId="{7DF22670-5938-4D81-A7CB-381824D9E4E5}" dt="2026-06-18T19:39:43.455" v="2360" actId="2696"/>
         <pc:sldMkLst>
           <pc:docMk/>
           <pc:sldMk cId="1438723332" sldId="262"/>
         </pc:sldMkLst>
+      </pc:sldChg>
+      <pc:sldChg chg="modSp new mod">
+        <pc:chgData name="Katarina Heüman Funch" userId="4c116d6fe25a2bfb" providerId="LiveId" clId="{7DF22670-5938-4D81-A7CB-381824D9E4E5}" dt="2026-06-18T19:46:20.992" v="2639" actId="27636"/>
+        <pc:sldMkLst>
+          <pc:docMk/>
+          <pc:sldMk cId="2024636785" sldId="263"/>
+        </pc:sldMkLst>
         <pc:spChg chg="mod">
-          <ac:chgData name="Katarina Heüman Funch" userId="4c116d6fe25a2bfb" providerId="LiveId" clId="{7DF22670-5938-4D81-A7CB-381824D9E4E5}" dt="2026-06-16T21:16:53.373" v="2062" actId="20577"/>
+          <ac:chgData name="Katarina Heüman Funch" userId="4c116d6fe25a2bfb" providerId="LiveId" clId="{7DF22670-5938-4D81-A7CB-381824D9E4E5}" dt="2026-06-18T19:32:41.021" v="2171" actId="20577"/>
           <ac:spMkLst>
             <pc:docMk/>
-            <pc:sldMk cId="1438723332" sldId="262"/>
-            <ac:spMk id="2" creationId="{BA2BD513-91F4-9B5C-2BE8-655BCD7349E2}"/>
+            <pc:sldMk cId="2024636785" sldId="263"/>
+            <ac:spMk id="2" creationId="{3A6121CA-ACE8-81F4-DA3C-052FD929A4CF}"/>
           </ac:spMkLst>
         </pc:spChg>
         <pc:spChg chg="mod">
-          <ac:chgData name="Katarina Heüman Funch" userId="4c116d6fe25a2bfb" providerId="LiveId" clId="{7DF22670-5938-4D81-A7CB-381824D9E4E5}" dt="2026-06-16T21:17:16.399" v="2126" actId="20577"/>
+          <ac:chgData name="Katarina Heüman Funch" userId="4c116d6fe25a2bfb" providerId="LiveId" clId="{7DF22670-5938-4D81-A7CB-381824D9E4E5}" dt="2026-06-18T19:35:13.344" v="2277" actId="1076"/>
           <ac:spMkLst>
             <pc:docMk/>
-            <pc:sldMk cId="1438723332" sldId="262"/>
-            <ac:spMk id="3" creationId="{D43FE235-A5C9-BA67-C478-F4FC831052ED}"/>
+            <pc:sldMk cId="2024636785" sldId="263"/>
+            <ac:spMk id="3" creationId="{20E06AD4-152A-1108-03A3-BCE65C2D499C}"/>
+          </ac:spMkLst>
+        </pc:spChg>
+        <pc:spChg chg="mod">
+          <ac:chgData name="Katarina Heüman Funch" userId="4c116d6fe25a2bfb" providerId="LiveId" clId="{7DF22670-5938-4D81-A7CB-381824D9E4E5}" dt="2026-06-18T19:46:20.989" v="2638" actId="27636"/>
+          <ac:spMkLst>
+            <pc:docMk/>
+            <pc:sldMk cId="2024636785" sldId="263"/>
+            <ac:spMk id="4" creationId="{478F1E19-7F41-8F22-9ACA-8BEA6DEA3828}"/>
+          </ac:spMkLst>
+        </pc:spChg>
+        <pc:spChg chg="mod">
+          <ac:chgData name="Katarina Heüman Funch" userId="4c116d6fe25a2bfb" providerId="LiveId" clId="{7DF22670-5938-4D81-A7CB-381824D9E4E5}" dt="2026-06-18T19:34:31.019" v="2257" actId="1076"/>
+          <ac:spMkLst>
+            <pc:docMk/>
+            <pc:sldMk cId="2024636785" sldId="263"/>
+            <ac:spMk id="5" creationId="{CEAF2EA9-B1A3-F20D-386A-C7ECC47AE935}"/>
+          </ac:spMkLst>
+        </pc:spChg>
+        <pc:spChg chg="mod">
+          <ac:chgData name="Katarina Heüman Funch" userId="4c116d6fe25a2bfb" providerId="LiveId" clId="{7DF22670-5938-4D81-A7CB-381824D9E4E5}" dt="2026-06-18T19:46:20.992" v="2639" actId="27636"/>
+          <ac:spMkLst>
+            <pc:docMk/>
+            <pc:sldMk cId="2024636785" sldId="263"/>
+            <ac:spMk id="6" creationId="{D2966EF4-CD53-8A5C-43CA-9A9158633BE7}"/>
           </ac:spMkLst>
         </pc:spChg>
       </pc:sldChg>
@@ -635,7 +571,7 @@
           <a:p>
             <a:fld id="{76EFF5C7-0AED-406F-9BE7-8D732D5FB325}" type="datetimeFigureOut">
               <a:rPr lang="da-DK" smtClean="0"/>
-              <a:t>17-06-2026</a:t>
+              <a:t>18-06-2026</a:t>
             </a:fld>
             <a:endParaRPr lang="da-DK"/>
           </a:p>
@@ -979,7 +915,7 @@
           <a:p>
             <a:fld id="{76EFF5C7-0AED-406F-9BE7-8D732D5FB325}" type="datetimeFigureOut">
               <a:rPr lang="da-DK" smtClean="0"/>
-              <a:t>17-06-2026</a:t>
+              <a:t>18-06-2026</a:t>
             </a:fld>
             <a:endParaRPr lang="da-DK"/>
           </a:p>
@@ -1159,7 +1095,7 @@
           <a:p>
             <a:fld id="{76EFF5C7-0AED-406F-9BE7-8D732D5FB325}" type="datetimeFigureOut">
               <a:rPr lang="da-DK" smtClean="0"/>
-              <a:t>17-06-2026</a:t>
+              <a:t>18-06-2026</a:t>
             </a:fld>
             <a:endParaRPr lang="da-DK"/>
           </a:p>
@@ -1329,7 +1265,7 @@
           <a:p>
             <a:fld id="{76EFF5C7-0AED-406F-9BE7-8D732D5FB325}" type="datetimeFigureOut">
               <a:rPr lang="da-DK" smtClean="0"/>
-              <a:t>17-06-2026</a:t>
+              <a:t>18-06-2026</a:t>
             </a:fld>
             <a:endParaRPr lang="da-DK"/>
           </a:p>
@@ -1601,7 +1537,7 @@
           <a:p>
             <a:fld id="{76EFF5C7-0AED-406F-9BE7-8D732D5FB325}" type="datetimeFigureOut">
               <a:rPr lang="da-DK" smtClean="0"/>
-              <a:t>17-06-2026</a:t>
+              <a:t>18-06-2026</a:t>
             </a:fld>
             <a:endParaRPr lang="da-DK"/>
           </a:p>
@@ -2002,7 +1938,7 @@
           <a:p>
             <a:fld id="{76EFF5C7-0AED-406F-9BE7-8D732D5FB325}" type="datetimeFigureOut">
               <a:rPr lang="da-DK" smtClean="0"/>
-              <a:t>17-06-2026</a:t>
+              <a:t>18-06-2026</a:t>
             </a:fld>
             <a:endParaRPr lang="da-DK"/>
           </a:p>
@@ -2479,7 +2415,7 @@
           <a:p>
             <a:fld id="{76EFF5C7-0AED-406F-9BE7-8D732D5FB325}" type="datetimeFigureOut">
               <a:rPr lang="da-DK" smtClean="0"/>
-              <a:t>17-06-2026</a:t>
+              <a:t>18-06-2026</a:t>
             </a:fld>
             <a:endParaRPr lang="da-DK"/>
           </a:p>
@@ -2597,7 +2533,7 @@
           <a:p>
             <a:fld id="{76EFF5C7-0AED-406F-9BE7-8D732D5FB325}" type="datetimeFigureOut">
               <a:rPr lang="da-DK" smtClean="0"/>
-              <a:t>17-06-2026</a:t>
+              <a:t>18-06-2026</a:t>
             </a:fld>
             <a:endParaRPr lang="da-DK"/>
           </a:p>
@@ -2692,7 +2628,7 @@
           <a:p>
             <a:fld id="{76EFF5C7-0AED-406F-9BE7-8D732D5FB325}" type="datetimeFigureOut">
               <a:rPr lang="da-DK" smtClean="0"/>
-              <a:t>17-06-2026</a:t>
+              <a:t>18-06-2026</a:t>
             </a:fld>
             <a:endParaRPr lang="da-DK"/>
           </a:p>
@@ -3045,7 +2981,7 @@
           <a:p>
             <a:fld id="{76EFF5C7-0AED-406F-9BE7-8D732D5FB325}" type="datetimeFigureOut">
               <a:rPr lang="da-DK" smtClean="0"/>
-              <a:t>17-06-2026</a:t>
+              <a:t>18-06-2026</a:t>
             </a:fld>
             <a:endParaRPr lang="da-DK"/>
           </a:p>
@@ -3447,7 +3383,7 @@
           <a:p>
             <a:fld id="{76EFF5C7-0AED-406F-9BE7-8D732D5FB325}" type="datetimeFigureOut">
               <a:rPr lang="da-DK" smtClean="0"/>
-              <a:t>17-06-2026</a:t>
+              <a:t>18-06-2026</a:t>
             </a:fld>
             <a:endParaRPr lang="da-DK"/>
           </a:p>
@@ -3729,7 +3665,7 @@
           <a:p>
             <a:fld id="{76EFF5C7-0AED-406F-9BE7-8D732D5FB325}" type="datetimeFigureOut">
               <a:rPr lang="da-DK" smtClean="0"/>
-              <a:t>17-06-2026</a:t>
+              <a:t>18-06-2026</a:t>
             </a:fld>
             <a:endParaRPr lang="da-DK"/>
           </a:p>
@@ -5675,7 +5611,7 @@
           <p:cNvPr id="2" name="Titel 1">
             <a:extLst>
               <a:ext uri="{FF2B5EF4-FFF2-40B4-BE49-F238E27FC236}">
-                <a16:creationId xmlns:a16="http://schemas.microsoft.com/office/drawing/2014/main" id="{BA2BD513-91F4-9B5C-2BE8-655BCD7349E2}"/>
+                <a16:creationId xmlns:a16="http://schemas.microsoft.com/office/drawing/2014/main" id="{3A6121CA-ACE8-81F4-DA3C-052FD929A4CF}"/>
               </a:ext>
             </a:extLst>
           </p:cNvPr>
@@ -5692,19 +5628,58 @@
           <a:lstStyle/>
           <a:p>
             <a:r>
-              <a:rPr lang="da-DK" dirty="0" err="1">
+              <a:rPr lang="en-US" noProof="0" dirty="0">
                 <a:solidFill>
                   <a:schemeClr val="tx2">
                     <a:lumMod val="50000"/>
                   </a:schemeClr>
                 </a:solidFill>
               </a:rPr>
-              <a:t>Conclusion</a:t>
-            </a:r>
-            <a:endParaRPr lang="da-DK" dirty="0">
+              <a:t>Things we haven’t done yet</a:t>
+            </a:r>
+          </a:p>
+        </p:txBody>
+      </p:sp>
+      <p:sp>
+        <p:nvSpPr>
+          <p:cNvPr id="3" name="Pladsholder til tekst 2">
+            <a:extLst>
+              <a:ext uri="{FF2B5EF4-FFF2-40B4-BE49-F238E27FC236}">
+                <a16:creationId xmlns:a16="http://schemas.microsoft.com/office/drawing/2014/main" id="{20E06AD4-152A-1108-03A3-BCE65C2D499C}"/>
+              </a:ext>
+            </a:extLst>
+          </p:cNvPr>
+          <p:cNvSpPr>
+            <a:spLocks noGrp="1"/>
+          </p:cNvSpPr>
+          <p:nvPr>
+            <p:ph type="body" idx="1"/>
+          </p:nvPr>
+        </p:nvSpPr>
+        <p:spPr>
+          <a:xfrm>
+            <a:off x="1371600" y="1759744"/>
+            <a:ext cx="4443984" cy="823912"/>
+          </a:xfrm>
+        </p:spPr>
+        <p:txBody>
+          <a:bodyPr/>
+          <a:lstStyle/>
+          <a:p>
+            <a:r>
+              <a:rPr lang="en-US" sz="2700" dirty="0">
+                <a:solidFill>
+                  <a:schemeClr val="tx2">
+                    <a:lumMod val="75000"/>
+                  </a:schemeClr>
+                </a:solidFill>
+              </a:rPr>
+              <a:t>What we’re planning to do</a:t>
+            </a:r>
+            <a:endParaRPr lang="en-US" sz="2700" noProof="0" dirty="0">
               <a:solidFill>
                 <a:schemeClr val="tx2">
-                  <a:lumMod val="50000"/>
+                  <a:lumMod val="75000"/>
                 </a:schemeClr>
               </a:solidFill>
             </a:endParaRPr>
@@ -5713,10 +5688,10 @@
       </p:sp>
       <p:sp>
         <p:nvSpPr>
-          <p:cNvPr id="3" name="Pladsholder til tekst 2">
+          <p:cNvPr id="4" name="Pladsholder til indhold 3">
             <a:extLst>
               <a:ext uri="{FF2B5EF4-FFF2-40B4-BE49-F238E27FC236}">
-                <a16:creationId xmlns:a16="http://schemas.microsoft.com/office/drawing/2014/main" id="{D43FE235-A5C9-BA67-C478-F4FC831052ED}"/>
+                <a16:creationId xmlns:a16="http://schemas.microsoft.com/office/drawing/2014/main" id="{478F1E19-7F41-8F22-9ACA-8BEA6DEA3828}"/>
               </a:ext>
             </a:extLst>
           </p:cNvPr>
@@ -5724,57 +5699,240 @@
             <a:spLocks noGrp="1"/>
           </p:cNvSpPr>
           <p:nvPr>
-            <p:ph type="body" idx="1"/>
-          </p:nvPr>
-        </p:nvSpPr>
-        <p:spPr/>
+            <p:ph sz="half" idx="2"/>
+          </p:nvPr>
+        </p:nvSpPr>
+        <p:spPr>
+          <a:xfrm>
+            <a:off x="1371600" y="2824084"/>
+            <a:ext cx="4443984" cy="3620258"/>
+          </a:xfrm>
+        </p:spPr>
         <p:txBody>
           <a:bodyPr>
-            <a:normAutofit fontScale="92500" lnSpcReduction="10000"/>
+            <a:normAutofit/>
           </a:bodyPr>
           <a:lstStyle/>
           <a:p>
             <a:r>
-              <a:rPr lang="da-DK" dirty="0">
+              <a:rPr lang="en-US" noProof="0" dirty="0">
+                <a:solidFill>
+                  <a:schemeClr val="tx2">
+                    <a:lumMod val="90000"/>
+                  </a:schemeClr>
+                </a:solidFill>
+              </a:rPr>
+              <a:t>Unit test</a:t>
+            </a:r>
+          </a:p>
+          <a:p>
+            <a:r>
+              <a:rPr lang="en-US" dirty="0">
+                <a:solidFill>
+                  <a:schemeClr val="tx2">
+                    <a:lumMod val="90000"/>
+                  </a:schemeClr>
+                </a:solidFill>
+              </a:rPr>
+              <a:t>Report writing</a:t>
+            </a:r>
+            <a:endParaRPr lang="en-US" noProof="0" dirty="0">
+              <a:solidFill>
+                <a:schemeClr val="tx2">
+                  <a:lumMod val="90000"/>
+                </a:schemeClr>
+              </a:solidFill>
+            </a:endParaRPr>
+          </a:p>
+        </p:txBody>
+      </p:sp>
+      <p:sp>
+        <p:nvSpPr>
+          <p:cNvPr id="5" name="Pladsholder til tekst 4">
+            <a:extLst>
+              <a:ext uri="{FF2B5EF4-FFF2-40B4-BE49-F238E27FC236}">
+                <a16:creationId xmlns:a16="http://schemas.microsoft.com/office/drawing/2014/main" id="{CEAF2EA9-B1A3-F20D-386A-C7ECC47AE935}"/>
+              </a:ext>
+            </a:extLst>
+          </p:cNvPr>
+          <p:cNvSpPr>
+            <a:spLocks noGrp="1"/>
+          </p:cNvSpPr>
+          <p:nvPr>
+            <p:ph type="body" sz="quarter" idx="3"/>
+          </p:nvPr>
+        </p:nvSpPr>
+        <p:spPr>
+          <a:xfrm>
+            <a:off x="6525014" y="1759744"/>
+            <a:ext cx="4883215" cy="823912"/>
+          </a:xfrm>
+        </p:spPr>
+        <p:txBody>
+          <a:bodyPr/>
+          <a:lstStyle/>
+          <a:p>
+            <a:r>
+              <a:rPr lang="en-US" sz="2700" dirty="0">
                 <a:solidFill>
                   <a:schemeClr val="tx2">
                     <a:lumMod val="75000"/>
                   </a:schemeClr>
                 </a:solidFill>
               </a:rPr>
-              <a:t>10/10 kalender</a:t>
-            </a:r>
-          </a:p>
-          <a:p>
-            <a:r>
-              <a:rPr lang="da-DK" dirty="0">
-                <a:solidFill>
-                  <a:schemeClr val="tx2">
-                    <a:lumMod val="75000"/>
-                  </a:schemeClr>
-                </a:solidFill>
-              </a:rPr>
-              <a:t>Tak for i aften</a:t>
-            </a:r>
-          </a:p>
-          <a:p>
-            <a:r>
-              <a:rPr lang="da-DK" dirty="0">
-                <a:solidFill>
-                  <a:schemeClr val="tx2">
-                    <a:lumMod val="75000"/>
-                  </a:schemeClr>
-                </a:solidFill>
-              </a:rPr>
-              <a:t>Godnat og sov godt</a:t>
-            </a:r>
+              <a:t>What we don’t have time to do</a:t>
+            </a:r>
+            <a:endParaRPr lang="en-US" sz="2700" noProof="0" dirty="0">
+              <a:solidFill>
+                <a:schemeClr val="tx2">
+                  <a:lumMod val="75000"/>
+                </a:schemeClr>
+              </a:solidFill>
+            </a:endParaRPr>
+          </a:p>
+        </p:txBody>
+      </p:sp>
+      <p:sp>
+        <p:nvSpPr>
+          <p:cNvPr id="6" name="Pladsholder til indhold 5">
+            <a:extLst>
+              <a:ext uri="{FF2B5EF4-FFF2-40B4-BE49-F238E27FC236}">
+                <a16:creationId xmlns:a16="http://schemas.microsoft.com/office/drawing/2014/main" id="{D2966EF4-CD53-8A5C-43CA-9A9158633BE7}"/>
+              </a:ext>
+            </a:extLst>
+          </p:cNvPr>
+          <p:cNvSpPr>
+            <a:spLocks noGrp="1"/>
+          </p:cNvSpPr>
+          <p:nvPr>
+            <p:ph sz="quarter" idx="4"/>
+          </p:nvPr>
+        </p:nvSpPr>
+        <p:spPr>
+          <a:xfrm>
+            <a:off x="6525014" y="2824083"/>
+            <a:ext cx="4813546" cy="3620259"/>
+          </a:xfrm>
+        </p:spPr>
+        <p:txBody>
+          <a:bodyPr>
+            <a:normAutofit/>
+          </a:bodyPr>
+          <a:lstStyle/>
+          <a:p>
+            <a:r>
+              <a:rPr lang="en-US" noProof="0" dirty="0">
+                <a:solidFill>
+                  <a:schemeClr val="tx2">
+                    <a:lumMod val="90000"/>
+                  </a:schemeClr>
+                </a:solidFill>
+              </a:rPr>
+              <a:t>Repeating events</a:t>
+            </a:r>
+          </a:p>
+          <a:p>
+            <a:r>
+              <a:rPr lang="en-US" dirty="0">
+                <a:solidFill>
+                  <a:schemeClr val="tx2">
+                    <a:lumMod val="90000"/>
+                  </a:schemeClr>
+                </a:solidFill>
+              </a:rPr>
+              <a:t>Seeing other people’s calendars</a:t>
+            </a:r>
+          </a:p>
+          <a:p>
+            <a:r>
+              <a:rPr lang="en-US" dirty="0">
+                <a:solidFill>
+                  <a:schemeClr val="tx2">
+                    <a:lumMod val="90000"/>
+                  </a:schemeClr>
+                </a:solidFill>
+              </a:rPr>
+              <a:t>Deleting and changing the events</a:t>
+            </a:r>
+          </a:p>
+          <a:p>
+            <a:r>
+              <a:rPr lang="en-US" dirty="0">
+                <a:solidFill>
+                  <a:schemeClr val="tx2">
+                    <a:lumMod val="90000"/>
+                  </a:schemeClr>
+                </a:solidFill>
+              </a:rPr>
+              <a:t>Changing language</a:t>
+            </a:r>
+          </a:p>
+          <a:p>
+            <a:r>
+              <a:rPr lang="en-US" dirty="0">
+                <a:solidFill>
+                  <a:schemeClr val="tx2">
+                    <a:lumMod val="90000"/>
+                  </a:schemeClr>
+                </a:solidFill>
+              </a:rPr>
+              <a:t>Changing colors</a:t>
+            </a:r>
+          </a:p>
+          <a:p>
+            <a:r>
+              <a:rPr lang="en-US" dirty="0">
+                <a:solidFill>
+                  <a:schemeClr val="tx2">
+                    <a:lumMod val="90000"/>
+                  </a:schemeClr>
+                </a:solidFill>
+              </a:rPr>
+              <a:t>Customize calendar types</a:t>
+            </a:r>
+          </a:p>
+          <a:p>
+            <a:r>
+              <a:rPr lang="en-US" dirty="0">
+                <a:solidFill>
+                  <a:schemeClr val="tx2">
+                    <a:lumMod val="90000"/>
+                  </a:schemeClr>
+                </a:solidFill>
+              </a:rPr>
+              <a:t>Sort the calendar by symbols</a:t>
+            </a:r>
+          </a:p>
+          <a:p>
+            <a:r>
+              <a:rPr lang="en-US" dirty="0">
+                <a:solidFill>
+                  <a:schemeClr val="tx2">
+                    <a:lumMod val="90000"/>
+                  </a:schemeClr>
+                </a:solidFill>
+              </a:rPr>
+              <a:t>Seeing only a week instead of a month</a:t>
+            </a:r>
+          </a:p>
+          <a:p>
+            <a:pPr marL="0" indent="0">
+              <a:buNone/>
+            </a:pPr>
+            <a:endParaRPr lang="en-US" noProof="0" dirty="0">
+              <a:solidFill>
+                <a:schemeClr val="tx2">
+                  <a:lumMod val="90000"/>
+                </a:schemeClr>
+              </a:solidFill>
+            </a:endParaRPr>
           </a:p>
         </p:txBody>
       </p:sp>
     </p:spTree>
     <p:extLst>
       <p:ext uri="{BB962C8B-B14F-4D97-AF65-F5344CB8AC3E}">
-        <p14:creationId xmlns:p14="http://schemas.microsoft.com/office/powerpoint/2010/main" val="1438723332"/>
+        <p14:creationId xmlns:p14="http://schemas.microsoft.com/office/powerpoint/2010/main" val="2024636785"/>
       </p:ext>
     </p:extLst>
   </p:cSld>

--- a/CalendarApp_Powerpoint.pptx
+++ b/CalendarApp_Powerpoint.pptx
@@ -4,6 +4,9 @@
   <p:sldMasterIdLst>
     <p:sldMasterId id="2147483660" r:id="rId1"/>
   </p:sldMasterIdLst>
+  <p:notesMasterIdLst>
+    <p:notesMasterId r:id="rId8"/>
+  </p:notesMasterIdLst>
   <p:sldIdLst>
     <p:sldId id="256" r:id="rId2"/>
     <p:sldId id="257" r:id="rId3"/>
@@ -122,12 +125,12 @@
   <pc:docChgLst>
     <pc:chgData name="Katarina Heüman Funch" userId="4c116d6fe25a2bfb" providerId="LiveId" clId="{7DF22670-5938-4D81-A7CB-381824D9E4E5}"/>
     <pc:docChg chg="undo custSel addSld delSld modSld">
-      <pc:chgData name="Katarina Heüman Funch" userId="4c116d6fe25a2bfb" providerId="LiveId" clId="{7DF22670-5938-4D81-A7CB-381824D9E4E5}" dt="2026-06-18T19:46:20.992" v="2639" actId="27636"/>
+      <pc:chgData name="Katarina Heüman Funch" userId="4c116d6fe25a2bfb" providerId="LiveId" clId="{7DF22670-5938-4D81-A7CB-381824D9E4E5}" dt="2026-06-19T07:39:16.567" v="2733" actId="20577"/>
       <pc:docMkLst>
         <pc:docMk/>
       </pc:docMkLst>
-      <pc:sldChg chg="modSp mod">
-        <pc:chgData name="Katarina Heüman Funch" userId="4c116d6fe25a2bfb" providerId="LiveId" clId="{7DF22670-5938-4D81-A7CB-381824D9E4E5}" dt="2026-06-16T20:40:02.504" v="875" actId="207"/>
+      <pc:sldChg chg="modSp mod modNotesTx">
+        <pc:chgData name="Katarina Heüman Funch" userId="4c116d6fe25a2bfb" providerId="LiveId" clId="{7DF22670-5938-4D81-A7CB-381824D9E4E5}" dt="2026-06-19T07:37:57.642" v="2691" actId="20577"/>
         <pc:sldMkLst>
           <pc:docMk/>
           <pc:sldMk cId="621453492" sldId="256"/>
@@ -149,8 +152,8 @@
           </ac:spMkLst>
         </pc:spChg>
       </pc:sldChg>
-      <pc:sldChg chg="modSp new mod">
-        <pc:chgData name="Katarina Heüman Funch" userId="4c116d6fe25a2bfb" providerId="LiveId" clId="{7DF22670-5938-4D81-A7CB-381824D9E4E5}" dt="2026-06-16T20:43:37.952" v="911" actId="12"/>
+      <pc:sldChg chg="modSp new mod modNotesTx">
+        <pc:chgData name="Katarina Heüman Funch" userId="4c116d6fe25a2bfb" providerId="LiveId" clId="{7DF22670-5938-4D81-A7CB-381824D9E4E5}" dt="2026-06-19T07:38:06.672" v="2701" actId="20577"/>
         <pc:sldMkLst>
           <pc:docMk/>
           <pc:sldMk cId="4257554591" sldId="257"/>
@@ -172,8 +175,8 @@
           </ac:spMkLst>
         </pc:spChg>
       </pc:sldChg>
-      <pc:sldChg chg="addSp delSp modSp new mod">
-        <pc:chgData name="Katarina Heüman Funch" userId="4c116d6fe25a2bfb" providerId="LiveId" clId="{7DF22670-5938-4D81-A7CB-381824D9E4E5}" dt="2026-06-16T20:47:08.025" v="996" actId="20577"/>
+      <pc:sldChg chg="addSp delSp modSp new mod modNotesTx">
+        <pc:chgData name="Katarina Heüman Funch" userId="4c116d6fe25a2bfb" providerId="LiveId" clId="{7DF22670-5938-4D81-A7CB-381824D9E4E5}" dt="2026-06-19T07:38:18.860" v="2707" actId="20577"/>
         <pc:sldMkLst>
           <pc:docMk/>
           <pc:sldMk cId="1650080889" sldId="258"/>
@@ -195,8 +198,8 @@
           </ac:spMkLst>
         </pc:spChg>
       </pc:sldChg>
-      <pc:sldChg chg="addSp delSp modSp new mod">
-        <pc:chgData name="Katarina Heüman Funch" userId="4c116d6fe25a2bfb" providerId="LiveId" clId="{7DF22670-5938-4D81-A7CB-381824D9E4E5}" dt="2026-06-16T21:05:05.891" v="1670" actId="20577"/>
+      <pc:sldChg chg="addSp delSp modSp new mod modNotesTx">
+        <pc:chgData name="Katarina Heüman Funch" userId="4c116d6fe25a2bfb" providerId="LiveId" clId="{7DF22670-5938-4D81-A7CB-381824D9E4E5}" dt="2026-06-19T07:38:24.312" v="2717" actId="20577"/>
         <pc:sldMkLst>
           <pc:docMk/>
           <pc:sldMk cId="4095286617" sldId="259"/>
@@ -258,8 +261,8 @@
           </ac:cxnSpMkLst>
         </pc:cxnChg>
       </pc:sldChg>
-      <pc:sldChg chg="modSp new mod">
-        <pc:chgData name="Katarina Heüman Funch" userId="4c116d6fe25a2bfb" providerId="LiveId" clId="{7DF22670-5938-4D81-A7CB-381824D9E4E5}" dt="2026-06-16T21:14:48.079" v="1990" actId="20577"/>
+      <pc:sldChg chg="modSp new mod modNotesTx">
+        <pc:chgData name="Katarina Heüman Funch" userId="4c116d6fe25a2bfb" providerId="LiveId" clId="{7DF22670-5938-4D81-A7CB-381824D9E4E5}" dt="2026-06-19T07:39:11.017" v="2723" actId="20577"/>
         <pc:sldMkLst>
           <pc:docMk/>
           <pc:sldMk cId="160134776" sldId="260"/>
@@ -288,8 +291,8 @@
           <pc:sldMk cId="1438723332" sldId="262"/>
         </pc:sldMkLst>
       </pc:sldChg>
-      <pc:sldChg chg="modSp new mod">
-        <pc:chgData name="Katarina Heüman Funch" userId="4c116d6fe25a2bfb" providerId="LiveId" clId="{7DF22670-5938-4D81-A7CB-381824D9E4E5}" dt="2026-06-18T19:46:20.992" v="2639" actId="27636"/>
+      <pc:sldChg chg="modSp new mod modNotesTx">
+        <pc:chgData name="Katarina Heüman Funch" userId="4c116d6fe25a2bfb" providerId="LiveId" clId="{7DF22670-5938-4D81-A7CB-381824D9E4E5}" dt="2026-06-19T07:39:16.567" v="2733" actId="20577"/>
         <pc:sldMkLst>
           <pc:docMk/>
           <pc:sldMk cId="2024636785" sldId="263"/>
@@ -358,22 +361,6 @@
             <ac:spMk id="3" creationId="{19EA37C2-684E-C0F3-EB22-32830CEDA409}"/>
           </ac:spMkLst>
         </pc:spChg>
-        <pc:spChg chg="del">
-          <ac:chgData name="Caroline Pradel" userId="52f372f68d297903" providerId="LiveId" clId="{2230F7C4-67A3-4EE6-B08F-3ADFEC37D923}" dt="2026-06-17T13:44:04.658" v="421" actId="478"/>
-          <ac:spMkLst>
-            <pc:docMk/>
-            <pc:sldMk cId="1650080889" sldId="258"/>
-            <ac:spMk id="7" creationId="{E5D61E61-1D06-B017-6D1C-E179CECED51D}"/>
-          </ac:spMkLst>
-        </pc:spChg>
-        <pc:picChg chg="add del mod">
-          <ac:chgData name="Caroline Pradel" userId="52f372f68d297903" providerId="LiveId" clId="{2230F7C4-67A3-4EE6-B08F-3ADFEC37D923}" dt="2026-06-17T13:54:55.349" v="532" actId="478"/>
-          <ac:picMkLst>
-            <pc:docMk/>
-            <pc:sldMk cId="1650080889" sldId="258"/>
-            <ac:picMk id="4" creationId="{3137EC1F-8ED5-E0A5-CB93-7CD77F6DD1C8}"/>
-          </ac:picMkLst>
-        </pc:picChg>
         <pc:picChg chg="add mod">
           <ac:chgData name="Caroline Pradel" userId="52f372f68d297903" providerId="LiveId" clId="{2230F7C4-67A3-4EE6-B08F-3ADFEC37D923}" dt="2026-06-17T13:57:09.292" v="540" actId="1582"/>
           <ac:picMkLst>
@@ -398,16 +385,894 @@
           </ac:spMkLst>
         </pc:spChg>
       </pc:sldChg>
-      <pc:sldChg chg="del">
-        <pc:chgData name="Caroline Pradel" userId="52f372f68d297903" providerId="LiveId" clId="{2230F7C4-67A3-4EE6-B08F-3ADFEC37D923}" dt="2026-06-17T13:52:12.878" v="531" actId="2696"/>
-        <pc:sldMkLst>
-          <pc:docMk/>
-          <pc:sldMk cId="1980791038" sldId="261"/>
-        </pc:sldMkLst>
-      </pc:sldChg>
     </pc:docChg>
   </pc:docChgLst>
 </pc:chgInfo>
+</file>
+
+<file path=ppt/notesMasters/notesMaster1.xml><?xml version="1.0" encoding="utf-8"?>
+<p:notesMaster xmlns:a="http://schemas.openxmlformats.org/drawingml/2006/main" xmlns:r="http://schemas.openxmlformats.org/officeDocument/2006/relationships" xmlns:p="http://schemas.openxmlformats.org/presentationml/2006/main">
+  <p:cSld>
+    <p:bg>
+      <p:bgRef idx="1001">
+        <a:schemeClr val="bg1"/>
+      </p:bgRef>
+    </p:bg>
+    <p:spTree>
+      <p:nvGrpSpPr>
+        <p:cNvPr id="1" name=""/>
+        <p:cNvGrpSpPr/>
+        <p:nvPr/>
+      </p:nvGrpSpPr>
+      <p:grpSpPr>
+        <a:xfrm>
+          <a:off x="0" y="0"/>
+          <a:ext cx="0" cy="0"/>
+          <a:chOff x="0" y="0"/>
+          <a:chExt cx="0" cy="0"/>
+        </a:xfrm>
+      </p:grpSpPr>
+      <p:sp>
+        <p:nvSpPr>
+          <p:cNvPr id="2" name="Pladsholder til sidehoved 1"/>
+          <p:cNvSpPr>
+            <a:spLocks noGrp="1"/>
+          </p:cNvSpPr>
+          <p:nvPr>
+            <p:ph type="hdr" sz="quarter"/>
+          </p:nvPr>
+        </p:nvSpPr>
+        <p:spPr>
+          <a:xfrm>
+            <a:off x="0" y="0"/>
+            <a:ext cx="2971800" cy="458788"/>
+          </a:xfrm>
+          <a:prstGeom prst="rect">
+            <a:avLst/>
+          </a:prstGeom>
+        </p:spPr>
+        <p:txBody>
+          <a:bodyPr vert="horz" lIns="91440" tIns="45720" rIns="91440" bIns="45720" rtlCol="0"/>
+          <a:lstStyle>
+            <a:lvl1pPr algn="l">
+              <a:defRPr sz="1200"/>
+            </a:lvl1pPr>
+          </a:lstStyle>
+          <a:p>
+            <a:endParaRPr lang="da-DK"/>
+          </a:p>
+        </p:txBody>
+      </p:sp>
+      <p:sp>
+        <p:nvSpPr>
+          <p:cNvPr id="3" name="Pladsholder til dato 2"/>
+          <p:cNvSpPr>
+            <a:spLocks noGrp="1"/>
+          </p:cNvSpPr>
+          <p:nvPr>
+            <p:ph type="dt" idx="1"/>
+          </p:nvPr>
+        </p:nvSpPr>
+        <p:spPr>
+          <a:xfrm>
+            <a:off x="3884613" y="0"/>
+            <a:ext cx="2971800" cy="458788"/>
+          </a:xfrm>
+          <a:prstGeom prst="rect">
+            <a:avLst/>
+          </a:prstGeom>
+        </p:spPr>
+        <p:txBody>
+          <a:bodyPr vert="horz" lIns="91440" tIns="45720" rIns="91440" bIns="45720" rtlCol="0"/>
+          <a:lstStyle>
+            <a:lvl1pPr algn="r">
+              <a:defRPr sz="1200"/>
+            </a:lvl1pPr>
+          </a:lstStyle>
+          <a:p>
+            <a:fld id="{55900391-A810-487A-A522-2AB9073A8F15}" type="datetimeFigureOut">
+              <a:rPr lang="da-DK" smtClean="0"/>
+              <a:t>19-06-2026</a:t>
+            </a:fld>
+            <a:endParaRPr lang="da-DK"/>
+          </a:p>
+        </p:txBody>
+      </p:sp>
+      <p:sp>
+        <p:nvSpPr>
+          <p:cNvPr id="4" name="Pladsholder til slidebillede 3"/>
+          <p:cNvSpPr>
+            <a:spLocks noGrp="1" noRot="1" noChangeAspect="1"/>
+          </p:cNvSpPr>
+          <p:nvPr>
+            <p:ph type="sldImg" idx="2"/>
+          </p:nvPr>
+        </p:nvSpPr>
+        <p:spPr>
+          <a:xfrm>
+            <a:off x="685800" y="1143000"/>
+            <a:ext cx="5486400" cy="3086100"/>
+          </a:xfrm>
+          <a:prstGeom prst="rect">
+            <a:avLst/>
+          </a:prstGeom>
+          <a:noFill/>
+          <a:ln w="12700">
+            <a:solidFill>
+              <a:prstClr val="black"/>
+            </a:solidFill>
+          </a:ln>
+        </p:spPr>
+        <p:txBody>
+          <a:bodyPr vert="horz" lIns="91440" tIns="45720" rIns="91440" bIns="45720" rtlCol="0" anchor="ctr"/>
+          <a:lstStyle/>
+          <a:p>
+            <a:endParaRPr lang="da-DK"/>
+          </a:p>
+        </p:txBody>
+      </p:sp>
+      <p:sp>
+        <p:nvSpPr>
+          <p:cNvPr id="5" name="Pladsholder til noter 4"/>
+          <p:cNvSpPr>
+            <a:spLocks noGrp="1"/>
+          </p:cNvSpPr>
+          <p:nvPr>
+            <p:ph type="body" sz="quarter" idx="3"/>
+          </p:nvPr>
+        </p:nvSpPr>
+        <p:spPr>
+          <a:xfrm>
+            <a:off x="685800" y="4400550"/>
+            <a:ext cx="5486400" cy="3600450"/>
+          </a:xfrm>
+          <a:prstGeom prst="rect">
+            <a:avLst/>
+          </a:prstGeom>
+        </p:spPr>
+        <p:txBody>
+          <a:bodyPr vert="horz" lIns="91440" tIns="45720" rIns="91440" bIns="45720" rtlCol="0"/>
+          <a:lstStyle/>
+          <a:p>
+            <a:pPr lvl="0"/>
+            <a:r>
+              <a:rPr lang="da-DK"/>
+              <a:t>Klik for at redigere teksttypografierne i masteren</a:t>
+            </a:r>
+          </a:p>
+          <a:p>
+            <a:pPr lvl="1"/>
+            <a:r>
+              <a:rPr lang="da-DK"/>
+              <a:t>Andet niveau</a:t>
+            </a:r>
+          </a:p>
+          <a:p>
+            <a:pPr lvl="2"/>
+            <a:r>
+              <a:rPr lang="da-DK"/>
+              <a:t>Tredje niveau</a:t>
+            </a:r>
+          </a:p>
+          <a:p>
+            <a:pPr lvl="3"/>
+            <a:r>
+              <a:rPr lang="da-DK"/>
+              <a:t>Fjerde niveau</a:t>
+            </a:r>
+          </a:p>
+          <a:p>
+            <a:pPr lvl="4"/>
+            <a:r>
+              <a:rPr lang="da-DK"/>
+              <a:t>Femte niveau</a:t>
+            </a:r>
+          </a:p>
+        </p:txBody>
+      </p:sp>
+      <p:sp>
+        <p:nvSpPr>
+          <p:cNvPr id="6" name="Pladsholder til sidefod 5"/>
+          <p:cNvSpPr>
+            <a:spLocks noGrp="1"/>
+          </p:cNvSpPr>
+          <p:nvPr>
+            <p:ph type="ftr" sz="quarter" idx="4"/>
+          </p:nvPr>
+        </p:nvSpPr>
+        <p:spPr>
+          <a:xfrm>
+            <a:off x="0" y="8685213"/>
+            <a:ext cx="2971800" cy="458787"/>
+          </a:xfrm>
+          <a:prstGeom prst="rect">
+            <a:avLst/>
+          </a:prstGeom>
+        </p:spPr>
+        <p:txBody>
+          <a:bodyPr vert="horz" lIns="91440" tIns="45720" rIns="91440" bIns="45720" rtlCol="0" anchor="b"/>
+          <a:lstStyle>
+            <a:lvl1pPr algn="l">
+              <a:defRPr sz="1200"/>
+            </a:lvl1pPr>
+          </a:lstStyle>
+          <a:p>
+            <a:endParaRPr lang="da-DK"/>
+          </a:p>
+        </p:txBody>
+      </p:sp>
+      <p:sp>
+        <p:nvSpPr>
+          <p:cNvPr id="7" name="Pladsholder til slidenummer 6"/>
+          <p:cNvSpPr>
+            <a:spLocks noGrp="1"/>
+          </p:cNvSpPr>
+          <p:nvPr>
+            <p:ph type="sldNum" sz="quarter" idx="5"/>
+          </p:nvPr>
+        </p:nvSpPr>
+        <p:spPr>
+          <a:xfrm>
+            <a:off x="3884613" y="8685213"/>
+            <a:ext cx="2971800" cy="458787"/>
+          </a:xfrm>
+          <a:prstGeom prst="rect">
+            <a:avLst/>
+          </a:prstGeom>
+        </p:spPr>
+        <p:txBody>
+          <a:bodyPr vert="horz" lIns="91440" tIns="45720" rIns="91440" bIns="45720" rtlCol="0" anchor="b"/>
+          <a:lstStyle>
+            <a:lvl1pPr algn="r">
+              <a:defRPr sz="1200"/>
+            </a:lvl1pPr>
+          </a:lstStyle>
+          <a:p>
+            <a:fld id="{42F32B19-27B5-44A6-857A-0A5CB7F33982}" type="slidenum">
+              <a:rPr lang="da-DK" smtClean="0"/>
+              <a:t>‹nr.›</a:t>
+            </a:fld>
+            <a:endParaRPr lang="da-DK"/>
+          </a:p>
+        </p:txBody>
+      </p:sp>
+    </p:spTree>
+    <p:extLst>
+      <p:ext uri="{BB962C8B-B14F-4D97-AF65-F5344CB8AC3E}">
+        <p14:creationId xmlns:p14="http://schemas.microsoft.com/office/powerpoint/2010/main" val="1588462865"/>
+      </p:ext>
+    </p:extLst>
+  </p:cSld>
+  <p:clrMap bg1="lt1" tx1="dk1" bg2="lt2" tx2="dk2" accent1="accent1" accent2="accent2" accent3="accent3" accent4="accent4" accent5="accent5" accent6="accent6" hlink="hlink" folHlink="folHlink"/>
+  <p:notesStyle>
+    <a:lvl1pPr marL="0" algn="l" defTabSz="914400" rtl="0" eaLnBrk="1" latinLnBrk="0" hangingPunct="1">
+      <a:defRPr sz="1200" kern="1200">
+        <a:solidFill>
+          <a:schemeClr val="tx1"/>
+        </a:solidFill>
+        <a:latin typeface="+mn-lt"/>
+        <a:ea typeface="+mn-ea"/>
+        <a:cs typeface="+mn-cs"/>
+      </a:defRPr>
+    </a:lvl1pPr>
+    <a:lvl2pPr marL="457200" algn="l" defTabSz="914400" rtl="0" eaLnBrk="1" latinLnBrk="0" hangingPunct="1">
+      <a:defRPr sz="1200" kern="1200">
+        <a:solidFill>
+          <a:schemeClr val="tx1"/>
+        </a:solidFill>
+        <a:latin typeface="+mn-lt"/>
+        <a:ea typeface="+mn-ea"/>
+        <a:cs typeface="+mn-cs"/>
+      </a:defRPr>
+    </a:lvl2pPr>
+    <a:lvl3pPr marL="914400" algn="l" defTabSz="914400" rtl="0" eaLnBrk="1" latinLnBrk="0" hangingPunct="1">
+      <a:defRPr sz="1200" kern="1200">
+        <a:solidFill>
+          <a:schemeClr val="tx1"/>
+        </a:solidFill>
+        <a:latin typeface="+mn-lt"/>
+        <a:ea typeface="+mn-ea"/>
+        <a:cs typeface="+mn-cs"/>
+      </a:defRPr>
+    </a:lvl3pPr>
+    <a:lvl4pPr marL="1371600" algn="l" defTabSz="914400" rtl="0" eaLnBrk="1" latinLnBrk="0" hangingPunct="1">
+      <a:defRPr sz="1200" kern="1200">
+        <a:solidFill>
+          <a:schemeClr val="tx1"/>
+        </a:solidFill>
+        <a:latin typeface="+mn-lt"/>
+        <a:ea typeface="+mn-ea"/>
+        <a:cs typeface="+mn-cs"/>
+      </a:defRPr>
+    </a:lvl4pPr>
+    <a:lvl5pPr marL="1828800" algn="l" defTabSz="914400" rtl="0" eaLnBrk="1" latinLnBrk="0" hangingPunct="1">
+      <a:defRPr sz="1200" kern="1200">
+        <a:solidFill>
+          <a:schemeClr val="tx1"/>
+        </a:solidFill>
+        <a:latin typeface="+mn-lt"/>
+        <a:ea typeface="+mn-ea"/>
+        <a:cs typeface="+mn-cs"/>
+      </a:defRPr>
+    </a:lvl5pPr>
+    <a:lvl6pPr marL="2286000" algn="l" defTabSz="914400" rtl="0" eaLnBrk="1" latinLnBrk="0" hangingPunct="1">
+      <a:defRPr sz="1200" kern="1200">
+        <a:solidFill>
+          <a:schemeClr val="tx1"/>
+        </a:solidFill>
+        <a:latin typeface="+mn-lt"/>
+        <a:ea typeface="+mn-ea"/>
+        <a:cs typeface="+mn-cs"/>
+      </a:defRPr>
+    </a:lvl6pPr>
+    <a:lvl7pPr marL="2743200" algn="l" defTabSz="914400" rtl="0" eaLnBrk="1" latinLnBrk="0" hangingPunct="1">
+      <a:defRPr sz="1200" kern="1200">
+        <a:solidFill>
+          <a:schemeClr val="tx1"/>
+        </a:solidFill>
+        <a:latin typeface="+mn-lt"/>
+        <a:ea typeface="+mn-ea"/>
+        <a:cs typeface="+mn-cs"/>
+      </a:defRPr>
+    </a:lvl7pPr>
+    <a:lvl8pPr marL="3200400" algn="l" defTabSz="914400" rtl="0" eaLnBrk="1" latinLnBrk="0" hangingPunct="1">
+      <a:defRPr sz="1200" kern="1200">
+        <a:solidFill>
+          <a:schemeClr val="tx1"/>
+        </a:solidFill>
+        <a:latin typeface="+mn-lt"/>
+        <a:ea typeface="+mn-ea"/>
+        <a:cs typeface="+mn-cs"/>
+      </a:defRPr>
+    </a:lvl8pPr>
+    <a:lvl9pPr marL="3657600" algn="l" defTabSz="914400" rtl="0" eaLnBrk="1" latinLnBrk="0" hangingPunct="1">
+      <a:defRPr sz="1200" kern="1200">
+        <a:solidFill>
+          <a:schemeClr val="tx1"/>
+        </a:solidFill>
+        <a:latin typeface="+mn-lt"/>
+        <a:ea typeface="+mn-ea"/>
+        <a:cs typeface="+mn-cs"/>
+      </a:defRPr>
+    </a:lvl9pPr>
+  </p:notesStyle>
+</p:notesMaster>
+</file>
+
+<file path=ppt/notesSlides/notesSlide1.xml><?xml version="1.0" encoding="utf-8"?>
+<p:notes xmlns:a="http://schemas.openxmlformats.org/drawingml/2006/main" xmlns:r="http://schemas.openxmlformats.org/officeDocument/2006/relationships" xmlns:p="http://schemas.openxmlformats.org/presentationml/2006/main">
+  <p:cSld>
+    <p:spTree>
+      <p:nvGrpSpPr>
+        <p:cNvPr id="1" name=""/>
+        <p:cNvGrpSpPr/>
+        <p:nvPr/>
+      </p:nvGrpSpPr>
+      <p:grpSpPr>
+        <a:xfrm>
+          <a:off x="0" y="0"/>
+          <a:ext cx="0" cy="0"/>
+          <a:chOff x="0" y="0"/>
+          <a:chExt cx="0" cy="0"/>
+        </a:xfrm>
+      </p:grpSpPr>
+      <p:sp>
+        <p:nvSpPr>
+          <p:cNvPr id="2" name="Pladsholder til slidebillede 1"/>
+          <p:cNvSpPr>
+            <a:spLocks noGrp="1" noRot="1" noChangeAspect="1"/>
+          </p:cNvSpPr>
+          <p:nvPr>
+            <p:ph type="sldImg"/>
+          </p:nvPr>
+        </p:nvSpPr>
+        <p:spPr/>
+      </p:sp>
+      <p:sp>
+        <p:nvSpPr>
+          <p:cNvPr id="3" name="Pladsholder til noter 2"/>
+          <p:cNvSpPr>
+            <a:spLocks noGrp="1"/>
+          </p:cNvSpPr>
+          <p:nvPr>
+            <p:ph type="body" idx="1"/>
+          </p:nvPr>
+        </p:nvSpPr>
+        <p:spPr/>
+        <p:txBody>
+          <a:bodyPr/>
+          <a:lstStyle/>
+          <a:p>
+            <a:r>
+              <a:rPr lang="da-DK" dirty="0"/>
+              <a:t>Caroline: </a:t>
+            </a:r>
+            <a:r>
+              <a:rPr lang="da-DK" dirty="0" err="1"/>
+              <a:t>Explain</a:t>
+            </a:r>
+            <a:r>
+              <a:rPr lang="da-DK" dirty="0"/>
+              <a:t> the </a:t>
+            </a:r>
+            <a:r>
+              <a:rPr lang="da-DK" dirty="0" err="1"/>
+              <a:t>project</a:t>
+            </a:r>
+            <a:endParaRPr lang="da-DK" dirty="0"/>
+          </a:p>
+        </p:txBody>
+      </p:sp>
+      <p:sp>
+        <p:nvSpPr>
+          <p:cNvPr id="4" name="Pladsholder til slidenummer 3"/>
+          <p:cNvSpPr>
+            <a:spLocks noGrp="1"/>
+          </p:cNvSpPr>
+          <p:nvPr>
+            <p:ph type="sldNum" sz="quarter" idx="5"/>
+          </p:nvPr>
+        </p:nvSpPr>
+        <p:spPr/>
+        <p:txBody>
+          <a:bodyPr/>
+          <a:lstStyle/>
+          <a:p>
+            <a:fld id="{42F32B19-27B5-44A6-857A-0A5CB7F33982}" type="slidenum">
+              <a:rPr lang="da-DK" smtClean="0"/>
+              <a:t>1</a:t>
+            </a:fld>
+            <a:endParaRPr lang="da-DK"/>
+          </a:p>
+        </p:txBody>
+      </p:sp>
+    </p:spTree>
+    <p:extLst>
+      <p:ext uri="{BB962C8B-B14F-4D97-AF65-F5344CB8AC3E}">
+        <p14:creationId xmlns:p14="http://schemas.microsoft.com/office/powerpoint/2010/main" val="561197769"/>
+      </p:ext>
+    </p:extLst>
+  </p:cSld>
+  <p:clrMapOvr>
+    <a:masterClrMapping/>
+  </p:clrMapOvr>
+</p:notes>
+</file>
+
+<file path=ppt/notesSlides/notesSlide2.xml><?xml version="1.0" encoding="utf-8"?>
+<p:notes xmlns:a="http://schemas.openxmlformats.org/drawingml/2006/main" xmlns:r="http://schemas.openxmlformats.org/officeDocument/2006/relationships" xmlns:p="http://schemas.openxmlformats.org/presentationml/2006/main">
+  <p:cSld>
+    <p:spTree>
+      <p:nvGrpSpPr>
+        <p:cNvPr id="1" name=""/>
+        <p:cNvGrpSpPr/>
+        <p:nvPr/>
+      </p:nvGrpSpPr>
+      <p:grpSpPr>
+        <a:xfrm>
+          <a:off x="0" y="0"/>
+          <a:ext cx="0" cy="0"/>
+          <a:chOff x="0" y="0"/>
+          <a:chExt cx="0" cy="0"/>
+        </a:xfrm>
+      </p:grpSpPr>
+      <p:sp>
+        <p:nvSpPr>
+          <p:cNvPr id="2" name="Pladsholder til slidebillede 1"/>
+          <p:cNvSpPr>
+            <a:spLocks noGrp="1" noRot="1" noChangeAspect="1"/>
+          </p:cNvSpPr>
+          <p:nvPr>
+            <p:ph type="sldImg"/>
+          </p:nvPr>
+        </p:nvSpPr>
+        <p:spPr/>
+      </p:sp>
+      <p:sp>
+        <p:nvSpPr>
+          <p:cNvPr id="3" name="Pladsholder til noter 2"/>
+          <p:cNvSpPr>
+            <a:spLocks noGrp="1"/>
+          </p:cNvSpPr>
+          <p:nvPr>
+            <p:ph type="body" idx="1"/>
+          </p:nvPr>
+        </p:nvSpPr>
+        <p:spPr/>
+        <p:txBody>
+          <a:bodyPr/>
+          <a:lstStyle/>
+          <a:p>
+            <a:r>
+              <a:rPr lang="da-DK" dirty="0"/>
+              <a:t>Katarina</a:t>
+            </a:r>
+          </a:p>
+        </p:txBody>
+      </p:sp>
+      <p:sp>
+        <p:nvSpPr>
+          <p:cNvPr id="4" name="Pladsholder til slidenummer 3"/>
+          <p:cNvSpPr>
+            <a:spLocks noGrp="1"/>
+          </p:cNvSpPr>
+          <p:nvPr>
+            <p:ph type="sldNum" sz="quarter" idx="5"/>
+          </p:nvPr>
+        </p:nvSpPr>
+        <p:spPr/>
+        <p:txBody>
+          <a:bodyPr/>
+          <a:lstStyle/>
+          <a:p>
+            <a:fld id="{42F32B19-27B5-44A6-857A-0A5CB7F33982}" type="slidenum">
+              <a:rPr lang="da-DK" smtClean="0"/>
+              <a:t>2</a:t>
+            </a:fld>
+            <a:endParaRPr lang="da-DK"/>
+          </a:p>
+        </p:txBody>
+      </p:sp>
+    </p:spTree>
+    <p:extLst>
+      <p:ext uri="{BB962C8B-B14F-4D97-AF65-F5344CB8AC3E}">
+        <p14:creationId xmlns:p14="http://schemas.microsoft.com/office/powerpoint/2010/main" val="2722263327"/>
+      </p:ext>
+    </p:extLst>
+  </p:cSld>
+  <p:clrMapOvr>
+    <a:masterClrMapping/>
+  </p:clrMapOvr>
+</p:notes>
+</file>
+
+<file path=ppt/notesSlides/notesSlide3.xml><?xml version="1.0" encoding="utf-8"?>
+<p:notes xmlns:a="http://schemas.openxmlformats.org/drawingml/2006/main" xmlns:r="http://schemas.openxmlformats.org/officeDocument/2006/relationships" xmlns:p="http://schemas.openxmlformats.org/presentationml/2006/main">
+  <p:cSld>
+    <p:spTree>
+      <p:nvGrpSpPr>
+        <p:cNvPr id="1" name=""/>
+        <p:cNvGrpSpPr/>
+        <p:nvPr/>
+      </p:nvGrpSpPr>
+      <p:grpSpPr>
+        <a:xfrm>
+          <a:off x="0" y="0"/>
+          <a:ext cx="0" cy="0"/>
+          <a:chOff x="0" y="0"/>
+          <a:chExt cx="0" cy="0"/>
+        </a:xfrm>
+      </p:grpSpPr>
+      <p:sp>
+        <p:nvSpPr>
+          <p:cNvPr id="2" name="Pladsholder til slidebillede 1"/>
+          <p:cNvSpPr>
+            <a:spLocks noGrp="1" noRot="1" noChangeAspect="1"/>
+          </p:cNvSpPr>
+          <p:nvPr>
+            <p:ph type="sldImg"/>
+          </p:nvPr>
+        </p:nvSpPr>
+        <p:spPr/>
+      </p:sp>
+      <p:sp>
+        <p:nvSpPr>
+          <p:cNvPr id="3" name="Pladsholder til noter 2"/>
+          <p:cNvSpPr>
+            <a:spLocks noGrp="1"/>
+          </p:cNvSpPr>
+          <p:nvPr>
+            <p:ph type="body" idx="1"/>
+          </p:nvPr>
+        </p:nvSpPr>
+        <p:spPr/>
+        <p:txBody>
+          <a:bodyPr/>
+          <a:lstStyle/>
+          <a:p>
+            <a:r>
+              <a:rPr lang="da-DK" dirty="0"/>
+              <a:t>Sophia</a:t>
+            </a:r>
+          </a:p>
+        </p:txBody>
+      </p:sp>
+      <p:sp>
+        <p:nvSpPr>
+          <p:cNvPr id="4" name="Pladsholder til slidenummer 3"/>
+          <p:cNvSpPr>
+            <a:spLocks noGrp="1"/>
+          </p:cNvSpPr>
+          <p:nvPr>
+            <p:ph type="sldNum" sz="quarter" idx="5"/>
+          </p:nvPr>
+        </p:nvSpPr>
+        <p:spPr/>
+        <p:txBody>
+          <a:bodyPr/>
+          <a:lstStyle/>
+          <a:p>
+            <a:fld id="{42F32B19-27B5-44A6-857A-0A5CB7F33982}" type="slidenum">
+              <a:rPr lang="da-DK" smtClean="0"/>
+              <a:t>3</a:t>
+            </a:fld>
+            <a:endParaRPr lang="da-DK"/>
+          </a:p>
+        </p:txBody>
+      </p:sp>
+    </p:spTree>
+    <p:extLst>
+      <p:ext uri="{BB962C8B-B14F-4D97-AF65-F5344CB8AC3E}">
+        <p14:creationId xmlns:p14="http://schemas.microsoft.com/office/powerpoint/2010/main" val="1160494355"/>
+      </p:ext>
+    </p:extLst>
+  </p:cSld>
+  <p:clrMapOvr>
+    <a:masterClrMapping/>
+  </p:clrMapOvr>
+</p:notes>
+</file>
+
+<file path=ppt/notesSlides/notesSlide4.xml><?xml version="1.0" encoding="utf-8"?>
+<p:notes xmlns:a="http://schemas.openxmlformats.org/drawingml/2006/main" xmlns:r="http://schemas.openxmlformats.org/officeDocument/2006/relationships" xmlns:p="http://schemas.openxmlformats.org/presentationml/2006/main">
+  <p:cSld>
+    <p:spTree>
+      <p:nvGrpSpPr>
+        <p:cNvPr id="1" name=""/>
+        <p:cNvGrpSpPr/>
+        <p:nvPr/>
+      </p:nvGrpSpPr>
+      <p:grpSpPr>
+        <a:xfrm>
+          <a:off x="0" y="0"/>
+          <a:ext cx="0" cy="0"/>
+          <a:chOff x="0" y="0"/>
+          <a:chExt cx="0" cy="0"/>
+        </a:xfrm>
+      </p:grpSpPr>
+      <p:sp>
+        <p:nvSpPr>
+          <p:cNvPr id="2" name="Pladsholder til slidebillede 1"/>
+          <p:cNvSpPr>
+            <a:spLocks noGrp="1" noRot="1" noChangeAspect="1"/>
+          </p:cNvSpPr>
+          <p:nvPr>
+            <p:ph type="sldImg"/>
+          </p:nvPr>
+        </p:nvSpPr>
+        <p:spPr/>
+      </p:sp>
+      <p:sp>
+        <p:nvSpPr>
+          <p:cNvPr id="3" name="Pladsholder til noter 2"/>
+          <p:cNvSpPr>
+            <a:spLocks noGrp="1"/>
+          </p:cNvSpPr>
+          <p:nvPr>
+            <p:ph type="body" idx="1"/>
+          </p:nvPr>
+        </p:nvSpPr>
+        <p:spPr/>
+        <p:txBody>
+          <a:bodyPr/>
+          <a:lstStyle/>
+          <a:p>
+            <a:r>
+              <a:rPr lang="da-DK" dirty="0"/>
+              <a:t>Katarina</a:t>
+            </a:r>
+          </a:p>
+        </p:txBody>
+      </p:sp>
+      <p:sp>
+        <p:nvSpPr>
+          <p:cNvPr id="4" name="Pladsholder til slidenummer 3"/>
+          <p:cNvSpPr>
+            <a:spLocks noGrp="1"/>
+          </p:cNvSpPr>
+          <p:nvPr>
+            <p:ph type="sldNum" sz="quarter" idx="5"/>
+          </p:nvPr>
+        </p:nvSpPr>
+        <p:spPr/>
+        <p:txBody>
+          <a:bodyPr/>
+          <a:lstStyle/>
+          <a:p>
+            <a:fld id="{42F32B19-27B5-44A6-857A-0A5CB7F33982}" type="slidenum">
+              <a:rPr lang="da-DK" smtClean="0"/>
+              <a:t>4</a:t>
+            </a:fld>
+            <a:endParaRPr lang="da-DK"/>
+          </a:p>
+        </p:txBody>
+      </p:sp>
+    </p:spTree>
+    <p:extLst>
+      <p:ext uri="{BB962C8B-B14F-4D97-AF65-F5344CB8AC3E}">
+        <p14:creationId xmlns:p14="http://schemas.microsoft.com/office/powerpoint/2010/main" val="4113892370"/>
+      </p:ext>
+    </p:extLst>
+  </p:cSld>
+  <p:clrMapOvr>
+    <a:masterClrMapping/>
+  </p:clrMapOvr>
+</p:notes>
+</file>
+
+<file path=ppt/notesSlides/notesSlide5.xml><?xml version="1.0" encoding="utf-8"?>
+<p:notes xmlns:a="http://schemas.openxmlformats.org/drawingml/2006/main" xmlns:r="http://schemas.openxmlformats.org/officeDocument/2006/relationships" xmlns:p="http://schemas.openxmlformats.org/presentationml/2006/main">
+  <p:cSld>
+    <p:spTree>
+      <p:nvGrpSpPr>
+        <p:cNvPr id="1" name=""/>
+        <p:cNvGrpSpPr/>
+        <p:nvPr/>
+      </p:nvGrpSpPr>
+      <p:grpSpPr>
+        <a:xfrm>
+          <a:off x="0" y="0"/>
+          <a:ext cx="0" cy="0"/>
+          <a:chOff x="0" y="0"/>
+          <a:chExt cx="0" cy="0"/>
+        </a:xfrm>
+      </p:grpSpPr>
+      <p:sp>
+        <p:nvSpPr>
+          <p:cNvPr id="2" name="Pladsholder til slidebillede 1"/>
+          <p:cNvSpPr>
+            <a:spLocks noGrp="1" noRot="1" noChangeAspect="1"/>
+          </p:cNvSpPr>
+          <p:nvPr>
+            <p:ph type="sldImg"/>
+          </p:nvPr>
+        </p:nvSpPr>
+        <p:spPr/>
+      </p:sp>
+      <p:sp>
+        <p:nvSpPr>
+          <p:cNvPr id="3" name="Pladsholder til noter 2"/>
+          <p:cNvSpPr>
+            <a:spLocks noGrp="1"/>
+          </p:cNvSpPr>
+          <p:nvPr>
+            <p:ph type="body" idx="1"/>
+          </p:nvPr>
+        </p:nvSpPr>
+        <p:spPr/>
+        <p:txBody>
+          <a:bodyPr/>
+          <a:lstStyle/>
+          <a:p>
+            <a:r>
+              <a:rPr lang="da-DK" dirty="0"/>
+              <a:t>Sophia</a:t>
+            </a:r>
+          </a:p>
+        </p:txBody>
+      </p:sp>
+      <p:sp>
+        <p:nvSpPr>
+          <p:cNvPr id="4" name="Pladsholder til slidenummer 3"/>
+          <p:cNvSpPr>
+            <a:spLocks noGrp="1"/>
+          </p:cNvSpPr>
+          <p:nvPr>
+            <p:ph type="sldNum" sz="quarter" idx="5"/>
+          </p:nvPr>
+        </p:nvSpPr>
+        <p:spPr/>
+        <p:txBody>
+          <a:bodyPr/>
+          <a:lstStyle/>
+          <a:p>
+            <a:fld id="{42F32B19-27B5-44A6-857A-0A5CB7F33982}" type="slidenum">
+              <a:rPr lang="da-DK" smtClean="0"/>
+              <a:t>5</a:t>
+            </a:fld>
+            <a:endParaRPr lang="da-DK"/>
+          </a:p>
+        </p:txBody>
+      </p:sp>
+    </p:spTree>
+    <p:extLst>
+      <p:ext uri="{BB962C8B-B14F-4D97-AF65-F5344CB8AC3E}">
+        <p14:creationId xmlns:p14="http://schemas.microsoft.com/office/powerpoint/2010/main" val="3890202271"/>
+      </p:ext>
+    </p:extLst>
+  </p:cSld>
+  <p:clrMapOvr>
+    <a:masterClrMapping/>
+  </p:clrMapOvr>
+</p:notes>
+</file>
+
+<file path=ppt/notesSlides/notesSlide6.xml><?xml version="1.0" encoding="utf-8"?>
+<p:notes xmlns:a="http://schemas.openxmlformats.org/drawingml/2006/main" xmlns:r="http://schemas.openxmlformats.org/officeDocument/2006/relationships" xmlns:p="http://schemas.openxmlformats.org/presentationml/2006/main">
+  <p:cSld>
+    <p:spTree>
+      <p:nvGrpSpPr>
+        <p:cNvPr id="1" name=""/>
+        <p:cNvGrpSpPr/>
+        <p:nvPr/>
+      </p:nvGrpSpPr>
+      <p:grpSpPr>
+        <a:xfrm>
+          <a:off x="0" y="0"/>
+          <a:ext cx="0" cy="0"/>
+          <a:chOff x="0" y="0"/>
+          <a:chExt cx="0" cy="0"/>
+        </a:xfrm>
+      </p:grpSpPr>
+      <p:sp>
+        <p:nvSpPr>
+          <p:cNvPr id="2" name="Pladsholder til slidebillede 1"/>
+          <p:cNvSpPr>
+            <a:spLocks noGrp="1" noRot="1" noChangeAspect="1"/>
+          </p:cNvSpPr>
+          <p:nvPr>
+            <p:ph type="sldImg"/>
+          </p:nvPr>
+        </p:nvSpPr>
+        <p:spPr/>
+      </p:sp>
+      <p:sp>
+        <p:nvSpPr>
+          <p:cNvPr id="3" name="Pladsholder til noter 2"/>
+          <p:cNvSpPr>
+            <a:spLocks noGrp="1"/>
+          </p:cNvSpPr>
+          <p:nvPr>
+            <p:ph type="body" idx="1"/>
+          </p:nvPr>
+        </p:nvSpPr>
+        <p:spPr/>
+        <p:txBody>
+          <a:bodyPr/>
+          <a:lstStyle/>
+          <a:p>
+            <a:r>
+              <a:rPr lang="da-DK"/>
+              <a:t>Caroline</a:t>
+            </a:r>
+            <a:endParaRPr lang="da-DK" dirty="0"/>
+          </a:p>
+        </p:txBody>
+      </p:sp>
+      <p:sp>
+        <p:nvSpPr>
+          <p:cNvPr id="4" name="Pladsholder til slidenummer 3"/>
+          <p:cNvSpPr>
+            <a:spLocks noGrp="1"/>
+          </p:cNvSpPr>
+          <p:nvPr>
+            <p:ph type="sldNum" sz="quarter" idx="5"/>
+          </p:nvPr>
+        </p:nvSpPr>
+        <p:spPr/>
+        <p:txBody>
+          <a:bodyPr/>
+          <a:lstStyle/>
+          <a:p>
+            <a:fld id="{42F32B19-27B5-44A6-857A-0A5CB7F33982}" type="slidenum">
+              <a:rPr lang="da-DK" smtClean="0"/>
+              <a:t>6</a:t>
+            </a:fld>
+            <a:endParaRPr lang="da-DK"/>
+          </a:p>
+        </p:txBody>
+      </p:sp>
+    </p:spTree>
+    <p:extLst>
+      <p:ext uri="{BB962C8B-B14F-4D97-AF65-F5344CB8AC3E}">
+        <p14:creationId xmlns:p14="http://schemas.microsoft.com/office/powerpoint/2010/main" val="903221891"/>
+      </p:ext>
+    </p:extLst>
+  </p:cSld>
+  <p:clrMapOvr>
+    <a:masterClrMapping/>
+  </p:clrMapOvr>
+</p:notes>
 </file>
 
 <file path=ppt/slideLayouts/slideLayout1.xml><?xml version="1.0" encoding="utf-8"?>
@@ -571,7 +1436,7 @@
           <a:p>
             <a:fld id="{76EFF5C7-0AED-406F-9BE7-8D732D5FB325}" type="datetimeFigureOut">
               <a:rPr lang="da-DK" smtClean="0"/>
-              <a:t>18-06-2026</a:t>
+              <a:t>19-06-2026</a:t>
             </a:fld>
             <a:endParaRPr lang="da-DK"/>
           </a:p>
@@ -915,7 +1780,7 @@
           <a:p>
             <a:fld id="{76EFF5C7-0AED-406F-9BE7-8D732D5FB325}" type="datetimeFigureOut">
               <a:rPr lang="da-DK" smtClean="0"/>
-              <a:t>18-06-2026</a:t>
+              <a:t>19-06-2026</a:t>
             </a:fld>
             <a:endParaRPr lang="da-DK"/>
           </a:p>
@@ -1095,7 +1960,7 @@
           <a:p>
             <a:fld id="{76EFF5C7-0AED-406F-9BE7-8D732D5FB325}" type="datetimeFigureOut">
               <a:rPr lang="da-DK" smtClean="0"/>
-              <a:t>18-06-2026</a:t>
+              <a:t>19-06-2026</a:t>
             </a:fld>
             <a:endParaRPr lang="da-DK"/>
           </a:p>
@@ -1265,7 +2130,7 @@
           <a:p>
             <a:fld id="{76EFF5C7-0AED-406F-9BE7-8D732D5FB325}" type="datetimeFigureOut">
               <a:rPr lang="da-DK" smtClean="0"/>
-              <a:t>18-06-2026</a:t>
+              <a:t>19-06-2026</a:t>
             </a:fld>
             <a:endParaRPr lang="da-DK"/>
           </a:p>
@@ -1537,7 +2402,7 @@
           <a:p>
             <a:fld id="{76EFF5C7-0AED-406F-9BE7-8D732D5FB325}" type="datetimeFigureOut">
               <a:rPr lang="da-DK" smtClean="0"/>
-              <a:t>18-06-2026</a:t>
+              <a:t>19-06-2026</a:t>
             </a:fld>
             <a:endParaRPr lang="da-DK"/>
           </a:p>
@@ -1938,7 +2803,7 @@
           <a:p>
             <a:fld id="{76EFF5C7-0AED-406F-9BE7-8D732D5FB325}" type="datetimeFigureOut">
               <a:rPr lang="da-DK" smtClean="0"/>
-              <a:t>18-06-2026</a:t>
+              <a:t>19-06-2026</a:t>
             </a:fld>
             <a:endParaRPr lang="da-DK"/>
           </a:p>
@@ -2415,7 +3280,7 @@
           <a:p>
             <a:fld id="{76EFF5C7-0AED-406F-9BE7-8D732D5FB325}" type="datetimeFigureOut">
               <a:rPr lang="da-DK" smtClean="0"/>
-              <a:t>18-06-2026</a:t>
+              <a:t>19-06-2026</a:t>
             </a:fld>
             <a:endParaRPr lang="da-DK"/>
           </a:p>
@@ -2533,7 +3398,7 @@
           <a:p>
             <a:fld id="{76EFF5C7-0AED-406F-9BE7-8D732D5FB325}" type="datetimeFigureOut">
               <a:rPr lang="da-DK" smtClean="0"/>
-              <a:t>18-06-2026</a:t>
+              <a:t>19-06-2026</a:t>
             </a:fld>
             <a:endParaRPr lang="da-DK"/>
           </a:p>
@@ -2628,7 +3493,7 @@
           <a:p>
             <a:fld id="{76EFF5C7-0AED-406F-9BE7-8D732D5FB325}" type="datetimeFigureOut">
               <a:rPr lang="da-DK" smtClean="0"/>
-              <a:t>18-06-2026</a:t>
+              <a:t>19-06-2026</a:t>
             </a:fld>
             <a:endParaRPr lang="da-DK"/>
           </a:p>
@@ -2981,7 +3846,7 @@
           <a:p>
             <a:fld id="{76EFF5C7-0AED-406F-9BE7-8D732D5FB325}" type="datetimeFigureOut">
               <a:rPr lang="da-DK" smtClean="0"/>
-              <a:t>18-06-2026</a:t>
+              <a:t>19-06-2026</a:t>
             </a:fld>
             <a:endParaRPr lang="da-DK"/>
           </a:p>
@@ -3383,7 +4248,7 @@
           <a:p>
             <a:fld id="{76EFF5C7-0AED-406F-9BE7-8D732D5FB325}" type="datetimeFigureOut">
               <a:rPr lang="da-DK" smtClean="0"/>
-              <a:t>18-06-2026</a:t>
+              <a:t>19-06-2026</a:t>
             </a:fld>
             <a:endParaRPr lang="da-DK"/>
           </a:p>
@@ -3665,7 +4530,7 @@
           <a:p>
             <a:fld id="{76EFF5C7-0AED-406F-9BE7-8D732D5FB325}" type="datetimeFigureOut">
               <a:rPr lang="da-DK" smtClean="0"/>
-              <a:t>18-06-2026</a:t>
+              <a:t>19-06-2026</a:t>
             </a:fld>
             <a:endParaRPr lang="da-DK"/>
           </a:p>
@@ -4861,7 +5726,7 @@
           <p:nvPr/>
         </p:nvPicPr>
         <p:blipFill>
-          <a:blip r:embed="rId2"/>
+          <a:blip r:embed="rId3"/>
           <a:stretch>
             <a:fillRect/>
           </a:stretch>
@@ -6198,4 +7063,299 @@
     </a:ext>
   </a:extLst>
 </a:theme>
+</file>
+
+<file path=ppt/theme/theme2.xml><?xml version="1.0" encoding="utf-8"?>
+<a:theme xmlns:a="http://schemas.openxmlformats.org/drawingml/2006/main" name="Office-tema">
+  <a:themeElements>
+    <a:clrScheme name="Office">
+      <a:dk1>
+        <a:sysClr val="windowText" lastClr="000000"/>
+      </a:dk1>
+      <a:lt1>
+        <a:sysClr val="window" lastClr="FFFFFF"/>
+      </a:lt1>
+      <a:dk2>
+        <a:srgbClr val="44546A"/>
+      </a:dk2>
+      <a:lt2>
+        <a:srgbClr val="E7E6E6"/>
+      </a:lt2>
+      <a:accent1>
+        <a:srgbClr val="4472C4"/>
+      </a:accent1>
+      <a:accent2>
+        <a:srgbClr val="ED7D31"/>
+      </a:accent2>
+      <a:accent3>
+        <a:srgbClr val="A5A5A5"/>
+      </a:accent3>
+      <a:accent4>
+        <a:srgbClr val="FFC000"/>
+      </a:accent4>
+      <a:accent5>
+        <a:srgbClr val="5B9BD5"/>
+      </a:accent5>
+      <a:accent6>
+        <a:srgbClr val="70AD47"/>
+      </a:accent6>
+      <a:hlink>
+        <a:srgbClr val="0563C1"/>
+      </a:hlink>
+      <a:folHlink>
+        <a:srgbClr val="954F72"/>
+      </a:folHlink>
+    </a:clrScheme>
+    <a:fontScheme name="Office">
+      <a:majorFont>
+        <a:latin typeface="Calibri Light" panose="020F0302020204030204"/>
+        <a:ea typeface=""/>
+        <a:cs typeface=""/>
+        <a:font script="Jpan" typeface="游ゴシック Light"/>
+        <a:font script="Hang" typeface="맑은 고딕"/>
+        <a:font script="Hans" typeface="等线 Light"/>
+        <a:font script="Hant" typeface="新細明體"/>
+        <a:font script="Arab" typeface="Times New Roman"/>
+        <a:font script="Hebr" typeface="Times New Roman"/>
+        <a:font script="Thai" typeface="Angsana New"/>
+        <a:font script="Ethi" typeface="Nyala"/>
+        <a:font script="Beng" typeface="Vrinda"/>
+        <a:font script="Gujr" typeface="Shruti"/>
+        <a:font script="Khmr" typeface="MoolBoran"/>
+        <a:font script="Knda" typeface="Tunga"/>
+        <a:font script="Guru" typeface="Raavi"/>
+        <a:font script="Cans" typeface="Euphemia"/>
+        <a:font script="Cher" typeface="Plantagenet Cherokee"/>
+        <a:font script="Yiii" typeface="Microsoft Yi Baiti"/>
+        <a:font script="Tibt" typeface="Microsoft Himalaya"/>
+        <a:font script="Thaa" typeface="MV Boli"/>
+        <a:font script="Deva" typeface="Mangal"/>
+        <a:font script="Telu" typeface="Gautami"/>
+        <a:font script="Taml" typeface="Latha"/>
+        <a:font script="Syrc" typeface="Estrangelo Edessa"/>
+        <a:font script="Orya" typeface="Kalinga"/>
+        <a:font script="Mlym" typeface="Kartika"/>
+        <a:font script="Laoo" typeface="DokChampa"/>
+        <a:font script="Sinh" typeface="Iskoola Pota"/>
+        <a:font script="Mong" typeface="Mongolian Baiti"/>
+        <a:font script="Viet" typeface="Times New Roman"/>
+        <a:font script="Uigh" typeface="Microsoft Uighur"/>
+        <a:font script="Geor" typeface="Sylfaen"/>
+        <a:font script="Armn" typeface="Arial"/>
+        <a:font script="Bugi" typeface="Leelawadee UI"/>
+        <a:font script="Bopo" typeface="Microsoft JhengHei"/>
+        <a:font script="Java" typeface="Javanese Text"/>
+        <a:font script="Lisu" typeface="Segoe UI"/>
+        <a:font script="Mymr" typeface="Myanmar Text"/>
+        <a:font script="Nkoo" typeface="Ebrima"/>
+        <a:font script="Olck" typeface="Nirmala UI"/>
+        <a:font script="Osma" typeface="Ebrima"/>
+        <a:font script="Phag" typeface="Phagspa"/>
+        <a:font script="Syrn" typeface="Estrangelo Edessa"/>
+        <a:font script="Syrj" typeface="Estrangelo Edessa"/>
+        <a:font script="Syre" typeface="Estrangelo Edessa"/>
+        <a:font script="Sora" typeface="Nirmala UI"/>
+        <a:font script="Tale" typeface="Microsoft Tai Le"/>
+        <a:font script="Talu" typeface="Microsoft New Tai Lue"/>
+        <a:font script="Tfng" typeface="Ebrima"/>
+      </a:majorFont>
+      <a:minorFont>
+        <a:latin typeface="Calibri" panose="020F0502020204030204"/>
+        <a:ea typeface=""/>
+        <a:cs typeface=""/>
+        <a:font script="Jpan" typeface="游ゴシック"/>
+        <a:font script="Hang" typeface="맑은 고딕"/>
+        <a:font script="Hans" typeface="等线"/>
+        <a:font script="Hant" typeface="新細明體"/>
+        <a:font script="Arab" typeface="Arial"/>
+        <a:font script="Hebr" typeface="Arial"/>
+        <a:font script="Thai" typeface="Cordia New"/>
+        <a:font script="Ethi" typeface="Nyala"/>
+        <a:font script="Beng" typeface="Vrinda"/>
+        <a:font script="Gujr" typeface="Shruti"/>
+        <a:font script="Khmr" typeface="DaunPenh"/>
+        <a:font script="Knda" typeface="Tunga"/>
+        <a:font script="Guru" typeface="Raavi"/>
+        <a:font script="Cans" typeface="Euphemia"/>
+        <a:font script="Cher" typeface="Plantagenet Cherokee"/>
+        <a:font script="Yiii" typeface="Microsoft Yi Baiti"/>
+        <a:font script="Tibt" typeface="Microsoft Himalaya"/>
+        <a:font script="Thaa" typeface="MV Boli"/>
+        <a:font script="Deva" typeface="Mangal"/>
+        <a:font script="Telu" typeface="Gautami"/>
+        <a:font script="Taml" typeface="Latha"/>
+        <a:font script="Syrc" typeface="Estrangelo Edessa"/>
+        <a:font script="Orya" typeface="Kalinga"/>
+        <a:font script="Mlym" typeface="Kartika"/>
+        <a:font script="Laoo" typeface="DokChampa"/>
+        <a:font script="Sinh" typeface="Iskoola Pota"/>
+        <a:font script="Mong" typeface="Mongolian Baiti"/>
+        <a:font script="Viet" typeface="Arial"/>
+        <a:font script="Uigh" typeface="Microsoft Uighur"/>
+        <a:font script="Geor" typeface="Sylfaen"/>
+        <a:font script="Armn" typeface="Arial"/>
+        <a:font script="Bugi" typeface="Leelawadee UI"/>
+        <a:font script="Bopo" typeface="Microsoft JhengHei"/>
+        <a:font script="Java" typeface="Javanese Text"/>
+        <a:font script="Lisu" typeface="Segoe UI"/>
+        <a:font script="Mymr" typeface="Myanmar Text"/>
+        <a:font script="Nkoo" typeface="Ebrima"/>
+        <a:font script="Olck" typeface="Nirmala UI"/>
+        <a:font script="Osma" typeface="Ebrima"/>
+        <a:font script="Phag" typeface="Phagspa"/>
+        <a:font script="Syrn" typeface="Estrangelo Edessa"/>
+        <a:font script="Syrj" typeface="Estrangelo Edessa"/>
+        <a:font script="Syre" typeface="Estrangelo Edessa"/>
+        <a:font script="Sora" typeface="Nirmala UI"/>
+        <a:font script="Tale" typeface="Microsoft Tai Le"/>
+        <a:font script="Talu" typeface="Microsoft New Tai Lue"/>
+        <a:font script="Tfng" typeface="Ebrima"/>
+      </a:minorFont>
+    </a:fontScheme>
+    <a:fmtScheme name="Office">
+      <a:fillStyleLst>
+        <a:solidFill>
+          <a:schemeClr val="phClr"/>
+        </a:solidFill>
+        <a:gradFill rotWithShape="1">
+          <a:gsLst>
+            <a:gs pos="0">
+              <a:schemeClr val="phClr">
+                <a:lumMod val="110000"/>
+                <a:satMod val="105000"/>
+                <a:tint val="67000"/>
+              </a:schemeClr>
+            </a:gs>
+            <a:gs pos="50000">
+              <a:schemeClr val="phClr">
+                <a:lumMod val="105000"/>
+                <a:satMod val="103000"/>
+                <a:tint val="73000"/>
+              </a:schemeClr>
+            </a:gs>
+            <a:gs pos="100000">
+              <a:schemeClr val="phClr">
+                <a:lumMod val="105000"/>
+                <a:satMod val="109000"/>
+                <a:tint val="81000"/>
+              </a:schemeClr>
+            </a:gs>
+          </a:gsLst>
+          <a:lin ang="5400000" scaled="0"/>
+        </a:gradFill>
+        <a:gradFill rotWithShape="1">
+          <a:gsLst>
+            <a:gs pos="0">
+              <a:schemeClr val="phClr">
+                <a:satMod val="103000"/>
+                <a:lumMod val="102000"/>
+                <a:tint val="94000"/>
+              </a:schemeClr>
+            </a:gs>
+            <a:gs pos="50000">
+              <a:schemeClr val="phClr">
+                <a:satMod val="110000"/>
+                <a:lumMod val="100000"/>
+                <a:shade val="100000"/>
+              </a:schemeClr>
+            </a:gs>
+            <a:gs pos="100000">
+              <a:schemeClr val="phClr">
+                <a:lumMod val="99000"/>
+                <a:satMod val="120000"/>
+                <a:shade val="78000"/>
+              </a:schemeClr>
+            </a:gs>
+          </a:gsLst>
+          <a:lin ang="5400000" scaled="0"/>
+        </a:gradFill>
+      </a:fillStyleLst>
+      <a:lnStyleLst>
+        <a:ln w="6350" cap="flat" cmpd="sng" algn="ctr">
+          <a:solidFill>
+            <a:schemeClr val="phClr"/>
+          </a:solidFill>
+          <a:prstDash val="solid"/>
+          <a:miter lim="800000"/>
+        </a:ln>
+        <a:ln w="12700" cap="flat" cmpd="sng" algn="ctr">
+          <a:solidFill>
+            <a:schemeClr val="phClr"/>
+          </a:solidFill>
+          <a:prstDash val="solid"/>
+          <a:miter lim="800000"/>
+        </a:ln>
+        <a:ln w="19050" cap="flat" cmpd="sng" algn="ctr">
+          <a:solidFill>
+            <a:schemeClr val="phClr"/>
+          </a:solidFill>
+          <a:prstDash val="solid"/>
+          <a:miter lim="800000"/>
+        </a:ln>
+      </a:lnStyleLst>
+      <a:effectStyleLst>
+        <a:effectStyle>
+          <a:effectLst/>
+        </a:effectStyle>
+        <a:effectStyle>
+          <a:effectLst/>
+        </a:effectStyle>
+        <a:effectStyle>
+          <a:effectLst>
+            <a:outerShdw blurRad="57150" dist="19050" dir="5400000" algn="ctr" rotWithShape="0">
+              <a:srgbClr val="000000">
+                <a:alpha val="63000"/>
+              </a:srgbClr>
+            </a:outerShdw>
+          </a:effectLst>
+        </a:effectStyle>
+      </a:effectStyleLst>
+      <a:bgFillStyleLst>
+        <a:solidFill>
+          <a:schemeClr val="phClr"/>
+        </a:solidFill>
+        <a:solidFill>
+          <a:schemeClr val="phClr">
+            <a:tint val="95000"/>
+            <a:satMod val="170000"/>
+          </a:schemeClr>
+        </a:solidFill>
+        <a:gradFill rotWithShape="1">
+          <a:gsLst>
+            <a:gs pos="0">
+              <a:schemeClr val="phClr">
+                <a:tint val="93000"/>
+                <a:satMod val="150000"/>
+                <a:shade val="98000"/>
+                <a:lumMod val="102000"/>
+              </a:schemeClr>
+            </a:gs>
+            <a:gs pos="50000">
+              <a:schemeClr val="phClr">
+                <a:tint val="98000"/>
+                <a:satMod val="130000"/>
+                <a:shade val="90000"/>
+                <a:lumMod val="103000"/>
+              </a:schemeClr>
+            </a:gs>
+            <a:gs pos="100000">
+              <a:schemeClr val="phClr">
+                <a:shade val="63000"/>
+                <a:satMod val="120000"/>
+              </a:schemeClr>
+            </a:gs>
+          </a:gsLst>
+          <a:lin ang="5400000" scaled="0"/>
+        </a:gradFill>
+      </a:bgFillStyleLst>
+    </a:fmtScheme>
+  </a:themeElements>
+  <a:objectDefaults/>
+  <a:extraClrSchemeLst/>
+  <a:extLst>
+    <a:ext uri="{05A4C25C-085E-4340-85A3-A5531E510DB2}">
+      <thm15:themeFamily xmlns:thm15="http://schemas.microsoft.com/office/thememl/2012/main" name="Office Theme" id="{62F939B6-93AF-4DB8-9C6B-D6C7DFDC589F}" vid="{4A3C46E8-61CC-4603-A589-7422A47A8E4A}"/>
+    </a:ext>
+  </a:extLst>
+</a:theme>
 </file>
--- a/CalendarApp_Powerpoint.pptx
+++ b/CalendarApp_Powerpoint.pptx
@@ -125,7 +125,7 @@
   <pc:docChgLst>
     <pc:chgData name="Katarina Heüman Funch" userId="4c116d6fe25a2bfb" providerId="LiveId" clId="{7DF22670-5938-4D81-A7CB-381824D9E4E5}"/>
     <pc:docChg chg="undo custSel addSld delSld modSld">
-      <pc:chgData name="Katarina Heüman Funch" userId="4c116d6fe25a2bfb" providerId="LiveId" clId="{7DF22670-5938-4D81-A7CB-381824D9E4E5}" dt="2026-06-19T07:39:16.567" v="2733" actId="20577"/>
+      <pc:chgData name="Katarina Heüman Funch" userId="4c116d6fe25a2bfb" providerId="LiveId" clId="{7DF22670-5938-4D81-A7CB-381824D9E4E5}" dt="2026-06-19T07:45:48.756" v="2755" actId="20577"/>
       <pc:docMkLst>
         <pc:docMk/>
       </pc:docMkLst>
@@ -292,7 +292,7 @@
         </pc:sldMkLst>
       </pc:sldChg>
       <pc:sldChg chg="modSp new mod modNotesTx">
-        <pc:chgData name="Katarina Heüman Funch" userId="4c116d6fe25a2bfb" providerId="LiveId" clId="{7DF22670-5938-4D81-A7CB-381824D9E4E5}" dt="2026-06-19T07:39:16.567" v="2733" actId="20577"/>
+        <pc:chgData name="Katarina Heüman Funch" userId="4c116d6fe25a2bfb" providerId="LiveId" clId="{7DF22670-5938-4D81-A7CB-381824D9E4E5}" dt="2026-06-19T07:45:48.756" v="2755" actId="20577"/>
         <pc:sldMkLst>
           <pc:docMk/>
           <pc:sldMk cId="2024636785" sldId="263"/>
@@ -330,7 +330,7 @@
           </ac:spMkLst>
         </pc:spChg>
         <pc:spChg chg="mod">
-          <ac:chgData name="Katarina Heüman Funch" userId="4c116d6fe25a2bfb" providerId="LiveId" clId="{7DF22670-5938-4D81-A7CB-381824D9E4E5}" dt="2026-06-18T19:46:20.992" v="2639" actId="27636"/>
+          <ac:chgData name="Katarina Heüman Funch" userId="4c116d6fe25a2bfb" providerId="LiveId" clId="{7DF22670-5938-4D81-A7CB-381824D9E4E5}" dt="2026-06-19T07:45:48.756" v="2755" actId="20577"/>
           <ac:spMkLst>
             <pc:docMk/>
             <pc:sldMk cId="2024636785" sldId="263"/>
@@ -1232,10 +1232,9 @@
           <a:lstStyle/>
           <a:p>
             <a:r>
-              <a:rPr lang="da-DK"/>
+              <a:rPr lang="da-DK" dirty="0"/>
               <a:t>Caroline</a:t>
             </a:r>
-            <a:endParaRPr lang="da-DK" dirty="0"/>
           </a:p>
         </p:txBody>
       </p:sp>
@@ -6765,7 +6764,7 @@
                   </a:schemeClr>
                 </a:solidFill>
               </a:rPr>
-              <a:t>Sort the calendar by symbols</a:t>
+              <a:t>Showing week numbers</a:t>
             </a:r>
           </a:p>
           <a:p>
